--- a/Presentacion_BloodMNIST_Santiago Lugo.pptx
+++ b/Presentacion_BloodMNIST_Santiago Lugo.pptx
@@ -11,12 +11,12 @@
     <p:sldId id="256" r:id="rId2"/>
     <p:sldId id="257" r:id="rId3"/>
     <p:sldId id="258" r:id="rId4"/>
-    <p:sldId id="259" r:id="rId5"/>
-    <p:sldId id="262" r:id="rId6"/>
-    <p:sldId id="263" r:id="rId7"/>
-    <p:sldId id="264" r:id="rId8"/>
-    <p:sldId id="265" r:id="rId9"/>
-    <p:sldId id="266" r:id="rId10"/>
+    <p:sldId id="262" r:id="rId5"/>
+    <p:sldId id="263" r:id="rId6"/>
+    <p:sldId id="264" r:id="rId7"/>
+    <p:sldId id="265" r:id="rId8"/>
+    <p:sldId id="266" r:id="rId9"/>
+    <p:sldId id="259" r:id="rId10"/>
     <p:sldId id="267" r:id="rId11"/>
     <p:sldId id="271" r:id="rId12"/>
     <p:sldId id="270" r:id="rId13"/>
@@ -128,6 +128,14 @@
 </p:presentation>
 </file>
 
+<file path=ppt/revisionInfo.xml><?xml version="1.0" encoding="utf-8"?>
+<p1510:revInfo xmlns:a="http://schemas.openxmlformats.org/drawingml/2006/main" xmlns:r="http://schemas.openxmlformats.org/officeDocument/2006/relationships" xmlns:p1510="http://schemas.microsoft.com/office/powerpoint/2015/10/main">
+  <p1510:revLst>
+    <p1510:client id="{1447F7AA-D655-8E15-115F-55853C5EA034}" v="11" dt="2026-10-16T14:37:48.679"/>
+  </p1510:revLst>
+</p1510:revInfo>
+</file>
+
 <file path=ppt/notesMasters/notesMaster1.xml><?xml version="1.0" encoding="utf-8"?>
 <p:notesMaster xmlns:a="http://schemas.openxmlformats.org/drawingml/2006/main" xmlns:r="http://schemas.openxmlformats.org/officeDocument/2006/relationships" xmlns:p="http://schemas.openxmlformats.org/presentationml/2006/main">
   <p:cSld>
@@ -970,7 +978,7 @@
           <a:lstStyle/>
           <a:p>
             <a:r>
-              <a:t>La tabla resume el macro-F1 de validation para cada configuración. A2 alcanzó 94.66% y A3 94.82%, una diferencia muy pequeña. Ambas superan claramente A1, mientras que D1 queda prácticamente junto a la línea base. C1 fue menor después de 40 épocas. Estos son resultados de una corrida por escenario, así que describen esta ejecución y no una regla universal. Fuente: outputs/runs/comparison.json.</a:t>
+              <a:t>Escenario de referencia. Las curvas muestran el descenso de pérdida y la mejora de exactitud en train y validation durante 40 épocas. Los gráficos se reproducen desde outputs/runs/A1/training_curves.png. La selección del checkpoint se realizó por menor pérdida de validation.</a:t>
             </a:r>
           </a:p>
         </p:txBody>
@@ -1047,7 +1055,7 @@
           <a:lstStyle/>
           <a:p>
             <a:r>
-              <a:t>Escenario de referencia. Las curvas muestran el descenso de pérdida y la mejora de exactitud en train y validation durante 40 épocas. Los gráficos se reproducen desde outputs/runs/A1/training_curves.png. La selección del checkpoint se realizó por menor pérdida de validation.</a:t>
+              <a:t>Se añade BatchNorm a la CNN base. En esta ejecución, la curva de validation presenta fluctuaciones marcadas, aunque el checkpoint alcanzó alto macro-F1 de validación. Los gráficos se reproducen desde outputs/runs/A2/training_curves.png. La selección del checkpoint se realizó por menor pérdida de validation.</a:t>
             </a:r>
           </a:p>
         </p:txBody>
@@ -1124,7 +1132,7 @@
           <a:lstStyle/>
           <a:p>
             <a:r>
-              <a:t>Se añade BatchNorm a la CNN base. En esta ejecución, la curva de validation presenta fluctuaciones marcadas, aunque el checkpoint alcanzó alto macro-F1 de validación. Los gráficos se reproducen desde outputs/runs/A2/training_curves.png. La selección del checkpoint se realizó por menor pérdida de validation.</a:t>
+              <a:t>Se combina BatchNorm con Dropout p=0.3. La figura muestra una mejora sostenida en train y variaciones pronunciadas en validation a lo largo del entrenamiento. Los gráficos se reproducen desde outputs/runs/A3/training_curves.png. La selección del checkpoint se realizó por menor pérdida de validation.</a:t>
             </a:r>
           </a:p>
         </p:txBody>
@@ -1201,7 +1209,7 @@
           <a:lstStyle/>
           <a:p>
             <a:r>
-              <a:t>Se combina BatchNorm con Dropout p=0.3. La figura muestra una mejora sostenida en train y variaciones pronunciadas en validation a lo largo del entrenamiento. Los gráficos se reproducen desde outputs/runs/A3/training_curves.png. La selección del checkpoint se realizó por menor pérdida de validation.</a:t>
+              <a:t>Se incorpora Dropout p=0.3 sin BatchNorm. Las curvas de train y validation descienden de forma más gradual en comparación con los escenarios que incorporan BatchNorm. Los gráficos se reproducen desde outputs/runs/D1/training_curves.png. La selección del checkpoint se realizó por menor pérdida de validation.</a:t>
             </a:r>
           </a:p>
         </p:txBody>
@@ -1278,7 +1286,7 @@
           <a:lstStyle/>
           <a:p>
             <a:r>
-              <a:t>Se incorpora Dropout p=0.3 sin BatchNorm. Las curvas de train y validation descienden de forma más gradual en comparación con los escenarios que incorporan BatchNorm. Los gráficos se reproducen desde outputs/runs/D1/training_curves.png. La selección del checkpoint se realizó por menor pérdida de validation.</a:t>
+              <a:t>Se mantiene la arquitectura base y se reduce la tasa de aprendizaje a 0.0003. La pérdida de validation desciende gradualmente durante las 40 épocas. Los gráficos se reproducen desde outputs/runs/C1/training_curves.png. La selección del checkpoint se realizó por menor pérdida de validation.</a:t>
             </a:r>
           </a:p>
         </p:txBody>
@@ -1355,7 +1363,7 @@
           <a:lstStyle/>
           <a:p>
             <a:r>
-              <a:t>Se mantiene la arquitectura base y se reduce la tasa de aprendizaje a 0.0003. La pérdida de validation desciende gradualmente durante las 40 épocas. Los gráficos se reproducen desde outputs/runs/C1/training_curves.png. La selección del checkpoint se realizó por menor pérdida de validation.</a:t>
+              <a:t>La tabla resume el macro-F1 de validation para cada configuración. A2 alcanzó 94.66% y A3 94.82%, una diferencia muy pequeña. Ambas superan claramente A1, mientras que D1 queda prácticamente junto a la línea base. C1 fue menor después de 40 épocas. Estos son resultados de una corrida por escenario, así que describen esta ejecución y no una regla universal. Fuente: outputs/runs/comparison.json.</a:t>
             </a:r>
           </a:p>
         </p:txBody>
@@ -14631,10 +14639,10 @@
       </p:grpSpPr>
       <p:sp>
         <p:nvSpPr>
-          <p:cNvPr id="35" name="Rectángulo 34">
-            <a:extLst>
-              <a:ext uri="{FF2B5EF4-FFF2-40B4-BE49-F238E27FC236}">
-                <a16:creationId xmlns:a16="http://schemas.microsoft.com/office/drawing/2014/main" id="{D2BF22AD-35B4-4633-BA0B-9670B3BD16BE}"/>
+          <p:cNvPr id="8" name="Rectángulo 7">
+            <a:extLst>
+              <a:ext uri="{FF2B5EF4-FFF2-40B4-BE49-F238E27FC236}">
+                <a16:creationId xmlns:a16="http://schemas.microsoft.com/office/drawing/2014/main" id="{330FE892-0469-4620-B433-ED049E05445D}"/>
               </a:ext>
             </a:extLst>
           </p:cNvPr>
@@ -14665,7 +14673,7 @@
           <p:cNvPr id="2" name="Rectángulo 1">
             <a:extLst>
               <a:ext uri="{FF2B5EF4-FFF2-40B4-BE49-F238E27FC236}">
-                <a16:creationId xmlns:a16="http://schemas.microsoft.com/office/drawing/2014/main" id="{5A0D6943-A786-4A83-997A-14A72DB01FB4}"/>
+                <a16:creationId xmlns:a16="http://schemas.microsoft.com/office/drawing/2014/main" id="{420D2906-37C7-41E6-AD0E-DC7BB9F24F69}"/>
               </a:ext>
             </a:extLst>
           </p:cNvPr>
@@ -14694,7 +14702,7 @@
           </a:bodyPr>
           <a:lstStyle>
             <a:defPPr algn="l">
-              <a:defRPr sz="3150" b="1">
+              <a:defRPr sz="3000" b="1">
                 <a:solidFill>
                   <a:srgbClr val="102A36"/>
                 </a:solidFill>
@@ -14710,7 +14718,7 @@
                 <a:spcPct val="105000"/>
               </a:lnSpc>
               <a:buNone/>
-              <a:defRPr sz="3150" b="1">
+              <a:defRPr sz="3000" b="1">
                 <a:solidFill>
                   <a:srgbClr val="102A36"/>
                 </a:solidFill>
@@ -14720,7 +14728,7 @@
               </a:defRPr>
             </a:pPr>
             <a:r>
-              <a:rPr sz="3150" b="1">
+              <a:rPr sz="3000" b="1">
                 <a:solidFill>
                   <a:srgbClr val="102A36"/>
                 </a:solidFill>
@@ -14728,7 +14736,7 @@
                 <a:ea typeface="Arial"/>
                 <a:cs typeface="Arial"/>
               </a:rPr>
-              <a:t>Validación: A2 y A3 lideran</a:t>
+              <a:t>A1 · CNN base</a:t>
             </a:r>
           </a:p>
         </p:txBody>
@@ -14738,7 +14746,7 @@
           <p:cNvPr id="3" name="Rectángulo 2">
             <a:extLst>
               <a:ext uri="{FF2B5EF4-FFF2-40B4-BE49-F238E27FC236}">
-                <a16:creationId xmlns:a16="http://schemas.microsoft.com/office/drawing/2014/main" id="{50EE96CF-7E54-4B28-805E-6B39D1FE3869}"/>
+                <a16:creationId xmlns:a16="http://schemas.microsoft.com/office/drawing/2014/main" id="{630B6962-004B-40D4-B97D-4282FE2215CD}"/>
               </a:ext>
             </a:extLst>
           </p:cNvPr>
@@ -14750,7 +14758,7 @@
         <p:spPr>
           <a:xfrm>
             <a:off x="628650" y="1038225"/>
-            <a:ext cx="10477500" cy="342900"/>
+            <a:ext cx="10477500" cy="323850"/>
           </a:xfrm>
           <a:prstGeom prst="rect">
             <a:avLst/>
@@ -14767,7 +14775,7 @@
           </a:bodyPr>
           <a:lstStyle>
             <a:defPPr algn="l">
-              <a:defRPr sz="1500" b="0">
+              <a:defRPr sz="1350" b="0">
                 <a:solidFill>
                   <a:srgbClr val="536C73"/>
                 </a:solidFill>
@@ -14783,7 +14791,7 @@
                 <a:spcPct val="105000"/>
               </a:lnSpc>
               <a:buNone/>
-              <a:defRPr sz="1500" b="0">
+              <a:defRPr sz="1350" b="0">
                 <a:solidFill>
                   <a:srgbClr val="536C73"/>
                 </a:solidFill>
@@ -14793,7 +14801,7 @@
               </a:defRPr>
             </a:pPr>
             <a:r>
-              <a:rPr sz="1500" b="0">
+              <a:rPr sz="1350" b="0">
                 <a:solidFill>
                   <a:srgbClr val="536C73"/>
                 </a:solidFill>
@@ -14801,7 +14809,7 @@
                 <a:ea typeface="Arial"/>
                 <a:cs typeface="Arial"/>
               </a:rPr>
-              <a:t>Macro-F1 (%) en el checkpoint seleccionado por menor pérdida de validación</a:t>
+              <a:t>Evolución de train y validation · 40 épocas</a:t>
             </a:r>
           </a:p>
         </p:txBody>
@@ -14811,7 +14819,7 @@
           <p:cNvPr id="4" name="Rectángulo 3">
             <a:extLst>
               <a:ext uri="{FF2B5EF4-FFF2-40B4-BE49-F238E27FC236}">
-                <a16:creationId xmlns:a16="http://schemas.microsoft.com/office/drawing/2014/main" id="{EBEE9313-C286-46A8-B0B2-E4D8F7A925ED}"/>
+                <a16:creationId xmlns:a16="http://schemas.microsoft.com/office/drawing/2014/main" id="{11B4F2C6-3D94-4836-92E6-26E8D8175BE7}"/>
               </a:ext>
             </a:extLst>
           </p:cNvPr>
@@ -14842,7 +14850,7 @@
           <p:cNvPr id="5" name="Rectángulo 4">
             <a:extLst>
               <a:ext uri="{FF2B5EF4-FFF2-40B4-BE49-F238E27FC236}">
-                <a16:creationId xmlns:a16="http://schemas.microsoft.com/office/drawing/2014/main" id="{F748BEBB-FDE1-489B-A61D-66F4C9CA5993}"/>
+                <a16:creationId xmlns:a16="http://schemas.microsoft.com/office/drawing/2014/main" id="{2FC95683-CC0B-43CA-8E3A-CB68B60288DA}"/>
               </a:ext>
             </a:extLst>
           </p:cNvPr>
@@ -14915,7 +14923,7 @@
           <p:cNvPr id="6" name="Rectángulo 5">
             <a:extLst>
               <a:ext uri="{FF2B5EF4-FFF2-40B4-BE49-F238E27FC236}">
-                <a16:creationId xmlns:a16="http://schemas.microsoft.com/office/drawing/2014/main" id="{A4A1AEBB-E833-4126-B85E-EF28212CA3F9}"/>
+                <a16:creationId xmlns:a16="http://schemas.microsoft.com/office/drawing/2014/main" id="{95E1F60E-5E28-44D4-A335-4E9A13C49A0F}"/>
               </a:ext>
             </a:extLst>
           </p:cNvPr>
@@ -14970,7 +14978,7 @@
               </a:defRPr>
             </a:pPr>
             <a:r>
-              <a:rPr sz="1200" b="1">
+              <a:rPr lang="es-MX" sz="1200" b="1">
                 <a:solidFill>
                   <a:srgbClr val="178C87"/>
                 </a:solidFill>
@@ -14983,1760 +14991,38 @@
           </a:p>
         </p:txBody>
       </p:sp>
-      <p:sp>
-        <p:nvSpPr>
-          <p:cNvPr id="7" name="Rectángulo 6">
-            <a:extLst>
-              <a:ext uri="{FF2B5EF4-FFF2-40B4-BE49-F238E27FC236}">
-                <a16:creationId xmlns:a16="http://schemas.microsoft.com/office/drawing/2014/main" id="{F867F495-C730-491C-B6B7-7E845A8D8C9A}"/>
-              </a:ext>
-            </a:extLst>
-          </p:cNvPr>
-          <p:cNvSpPr>
-            <a:spLocks noGrp="1"/>
-          </p:cNvSpPr>
-          <p:nvPr/>
-        </p:nvSpPr>
-        <p:spPr>
-          <a:xfrm>
-            <a:off x="781050" y="1781175"/>
-            <a:ext cx="3429000" cy="247650"/>
-          </a:xfrm>
-          <a:prstGeom prst="rect">
-            <a:avLst/>
-          </a:prstGeom>
-          <a:noFill/>
-          <a:ln w="0">
-            <a:noFill/>
-            <a:prstDash val="solid"/>
-          </a:ln>
-        </p:spPr>
-        <p:txBody>
-          <a:bodyPr wrap="square" lIns="0" tIns="0" rIns="0" bIns="0" anchor="t">
-            <a:normAutofit/>
-          </a:bodyPr>
-          <a:lstStyle>
-            <a:defPPr algn="l">
-              <a:defRPr sz="1200" b="1">
-                <a:solidFill>
-                  <a:srgbClr val="536C73"/>
-                </a:solidFill>
-                <a:latin typeface="Arial"/>
-                <a:ea typeface="Arial"/>
-                <a:cs typeface="Arial"/>
-              </a:defRPr>
-            </a:defPPr>
-          </a:lstStyle>
-          <a:p>
-            <a:pPr algn="l">
-              <a:lnSpc>
-                <a:spcPct val="105000"/>
-              </a:lnSpc>
-              <a:buNone/>
-              <a:defRPr sz="1200" b="1">
-                <a:solidFill>
-                  <a:srgbClr val="536C73"/>
-                </a:solidFill>
-                <a:latin typeface="Arial"/>
-                <a:ea typeface="Arial"/>
-                <a:cs typeface="Arial"/>
-              </a:defRPr>
-            </a:pPr>
-            <a:r>
-              <a:rPr sz="1200" b="1">
-                <a:solidFill>
-                  <a:srgbClr val="536C73"/>
-                </a:solidFill>
-                <a:latin typeface="Arial"/>
-                <a:ea typeface="Arial"/>
-                <a:cs typeface="Arial"/>
-              </a:rPr>
-              <a:t>ESCENARIO</a:t>
-            </a:r>
-          </a:p>
-        </p:txBody>
-      </p:sp>
-      <p:sp>
-        <p:nvSpPr>
-          <p:cNvPr id="8" name="Rectángulo 7">
-            <a:extLst>
-              <a:ext uri="{FF2B5EF4-FFF2-40B4-BE49-F238E27FC236}">
-                <a16:creationId xmlns:a16="http://schemas.microsoft.com/office/drawing/2014/main" id="{21D4DB52-E8B4-44A7-B6EA-E0F31B05E79C}"/>
-              </a:ext>
-            </a:extLst>
-          </p:cNvPr>
-          <p:cNvSpPr>
-            <a:spLocks noGrp="1"/>
-          </p:cNvSpPr>
-          <p:nvPr/>
-        </p:nvSpPr>
-        <p:spPr>
-          <a:xfrm>
-            <a:off x="5524500" y="1781175"/>
-            <a:ext cx="1428750" cy="247650"/>
-          </a:xfrm>
-          <a:prstGeom prst="rect">
-            <a:avLst/>
-          </a:prstGeom>
-          <a:noFill/>
-          <a:ln w="0">
-            <a:noFill/>
-            <a:prstDash val="solid"/>
-          </a:ln>
-        </p:spPr>
-        <p:txBody>
-          <a:bodyPr wrap="square" lIns="0" tIns="0" rIns="0" bIns="0" anchor="t">
-            <a:normAutofit/>
-          </a:bodyPr>
-          <a:lstStyle>
-            <a:defPPr algn="r">
-              <a:defRPr sz="1200" b="1">
-                <a:solidFill>
-                  <a:srgbClr val="536C73"/>
-                </a:solidFill>
-                <a:latin typeface="Arial"/>
-                <a:ea typeface="Arial"/>
-                <a:cs typeface="Arial"/>
-              </a:defRPr>
-            </a:defPPr>
-          </a:lstStyle>
-          <a:p>
-            <a:pPr algn="r">
-              <a:lnSpc>
-                <a:spcPct val="105000"/>
-              </a:lnSpc>
-              <a:buNone/>
-              <a:defRPr sz="1200" b="1">
-                <a:solidFill>
-                  <a:srgbClr val="536C73"/>
-                </a:solidFill>
-                <a:latin typeface="Arial"/>
-                <a:ea typeface="Arial"/>
-                <a:cs typeface="Arial"/>
-              </a:defRPr>
-            </a:pPr>
-            <a:r>
-              <a:rPr sz="1200" b="1">
-                <a:solidFill>
-                  <a:srgbClr val="536C73"/>
-                </a:solidFill>
-                <a:latin typeface="Arial"/>
-                <a:ea typeface="Arial"/>
-                <a:cs typeface="Arial"/>
-              </a:rPr>
-              <a:t>MACRO-F1</a:t>
-            </a:r>
-          </a:p>
-        </p:txBody>
-      </p:sp>
-      <p:sp>
-        <p:nvSpPr>
-          <p:cNvPr id="9" name="Rectángulo 8">
-            <a:extLst>
-              <a:ext uri="{FF2B5EF4-FFF2-40B4-BE49-F238E27FC236}">
-                <a16:creationId xmlns:a16="http://schemas.microsoft.com/office/drawing/2014/main" id="{C3ACC8C6-D31E-4CA5-A54F-BC06C0438D8E}"/>
-              </a:ext>
-            </a:extLst>
-          </p:cNvPr>
-          <p:cNvSpPr>
-            <a:spLocks noGrp="1"/>
-          </p:cNvSpPr>
-          <p:nvPr/>
-        </p:nvSpPr>
-        <p:spPr>
-          <a:xfrm>
-            <a:off x="742950" y="2105025"/>
-            <a:ext cx="6381750" cy="9525"/>
-          </a:xfrm>
-          <a:prstGeom prst="rect">
-            <a:avLst/>
-          </a:prstGeom>
-          <a:solidFill>
-            <a:srgbClr val="C8D7D5"/>
-          </a:solidFill>
-          <a:ln w="0">
-            <a:noFill/>
-            <a:prstDash val="solid"/>
-          </a:ln>
-        </p:spPr>
-      </p:sp>
-      <p:sp>
-        <p:nvSpPr>
-          <p:cNvPr id="10" name="Rectángulo 9">
-            <a:extLst>
-              <a:ext uri="{FF2B5EF4-FFF2-40B4-BE49-F238E27FC236}">
-                <a16:creationId xmlns:a16="http://schemas.microsoft.com/office/drawing/2014/main" id="{968FF3AE-C636-47AB-9D53-AB0A50A60F2F}"/>
-              </a:ext>
-            </a:extLst>
-          </p:cNvPr>
-          <p:cNvSpPr>
-            <a:spLocks noGrp="1"/>
-          </p:cNvSpPr>
-          <p:nvPr/>
-        </p:nvSpPr>
-        <p:spPr>
-          <a:xfrm>
-            <a:off x="800100" y="2286000"/>
-            <a:ext cx="666750" cy="333375"/>
-          </a:xfrm>
-          <a:prstGeom prst="rect">
-            <a:avLst/>
-          </a:prstGeom>
-          <a:noFill/>
-          <a:ln w="0">
-            <a:noFill/>
-            <a:prstDash val="solid"/>
-          </a:ln>
-        </p:spPr>
-        <p:txBody>
-          <a:bodyPr wrap="square" lIns="0" tIns="0" rIns="0" bIns="0" anchor="t">
-            <a:normAutofit/>
-          </a:bodyPr>
-          <a:lstStyle>
-            <a:defPPr algn="l">
-              <a:defRPr sz="1650" b="1">
-                <a:solidFill>
-                  <a:srgbClr val="178C87"/>
-                </a:solidFill>
-                <a:latin typeface="Arial"/>
-                <a:ea typeface="Arial"/>
-                <a:cs typeface="Arial"/>
-              </a:defRPr>
-            </a:defPPr>
-          </a:lstStyle>
-          <a:p>
-            <a:pPr algn="l">
-              <a:lnSpc>
-                <a:spcPct val="105000"/>
-              </a:lnSpc>
-              <a:buNone/>
-              <a:defRPr sz="1650" b="1">
-                <a:solidFill>
-                  <a:srgbClr val="178C87"/>
-                </a:solidFill>
-                <a:latin typeface="Arial"/>
-                <a:ea typeface="Arial"/>
-                <a:cs typeface="Arial"/>
-              </a:defRPr>
-            </a:pPr>
-            <a:r>
-              <a:rPr sz="1650" b="1">
-                <a:solidFill>
-                  <a:srgbClr val="178C87"/>
-                </a:solidFill>
-                <a:latin typeface="Arial"/>
-                <a:ea typeface="Arial"/>
-                <a:cs typeface="Arial"/>
-              </a:rPr>
-              <a:t>A1</a:t>
-            </a:r>
-          </a:p>
-        </p:txBody>
-      </p:sp>
-      <p:sp>
-        <p:nvSpPr>
-          <p:cNvPr id="11" name="Rectángulo 10">
-            <a:extLst>
-              <a:ext uri="{FF2B5EF4-FFF2-40B4-BE49-F238E27FC236}">
-                <a16:creationId xmlns:a16="http://schemas.microsoft.com/office/drawing/2014/main" id="{307E51C5-09F2-4964-A84A-EADDC37FA8E3}"/>
-              </a:ext>
-            </a:extLst>
-          </p:cNvPr>
-          <p:cNvSpPr>
-            <a:spLocks noGrp="1"/>
-          </p:cNvSpPr>
-          <p:nvPr/>
-        </p:nvSpPr>
-        <p:spPr>
-          <a:xfrm>
-            <a:off x="1619250" y="2286000"/>
-            <a:ext cx="3714750" cy="342900"/>
-          </a:xfrm>
-          <a:prstGeom prst="rect">
-            <a:avLst/>
-          </a:prstGeom>
-          <a:noFill/>
-          <a:ln w="0">
-            <a:noFill/>
-            <a:prstDash val="solid"/>
-          </a:ln>
-        </p:spPr>
-        <p:txBody>
-          <a:bodyPr wrap="square" lIns="0" tIns="0" rIns="0" bIns="0" anchor="t">
-            <a:normAutofit/>
-          </a:bodyPr>
-          <a:lstStyle>
-            <a:defPPr algn="l">
-              <a:defRPr sz="1575" b="0">
-                <a:solidFill>
-                  <a:srgbClr val="18323B"/>
-                </a:solidFill>
-                <a:latin typeface="Arial"/>
-                <a:ea typeface="Arial"/>
-                <a:cs typeface="Arial"/>
-              </a:defRPr>
-            </a:defPPr>
-          </a:lstStyle>
-          <a:p>
-            <a:pPr algn="l">
-              <a:lnSpc>
-                <a:spcPct val="105000"/>
-              </a:lnSpc>
-              <a:buNone/>
-              <a:defRPr sz="1575" b="0">
-                <a:solidFill>
-                  <a:srgbClr val="18323B"/>
-                </a:solidFill>
-                <a:latin typeface="Arial"/>
-                <a:ea typeface="Arial"/>
-                <a:cs typeface="Arial"/>
-              </a:defRPr>
-            </a:pPr>
-            <a:r>
-              <a:rPr sz="1575" b="0">
-                <a:solidFill>
-                  <a:srgbClr val="18323B"/>
-                </a:solidFill>
-                <a:latin typeface="Arial"/>
-                <a:ea typeface="Arial"/>
-                <a:cs typeface="Arial"/>
-              </a:rPr>
-              <a:t>CNN base</a:t>
-            </a:r>
-          </a:p>
-        </p:txBody>
-      </p:sp>
-      <p:sp>
-        <p:nvSpPr>
-          <p:cNvPr id="12" name="Rectángulo 11">
-            <a:extLst>
-              <a:ext uri="{FF2B5EF4-FFF2-40B4-BE49-F238E27FC236}">
-                <a16:creationId xmlns:a16="http://schemas.microsoft.com/office/drawing/2014/main" id="{96934CEE-3AE5-4061-996B-0E75D0567143}"/>
-              </a:ext>
-            </a:extLst>
-          </p:cNvPr>
-          <p:cNvSpPr>
-            <a:spLocks noGrp="1"/>
-          </p:cNvSpPr>
-          <p:nvPr/>
-        </p:nvSpPr>
-        <p:spPr>
-          <a:xfrm>
-            <a:off x="5524500" y="2286000"/>
-            <a:ext cx="1428750" cy="342900"/>
-          </a:xfrm>
-          <a:prstGeom prst="rect">
-            <a:avLst/>
-          </a:prstGeom>
-          <a:noFill/>
-          <a:ln w="0">
-            <a:noFill/>
-            <a:prstDash val="solid"/>
-          </a:ln>
-        </p:spPr>
-        <p:txBody>
-          <a:bodyPr wrap="square" lIns="0" tIns="0" rIns="0" bIns="0" anchor="t">
-            <a:normAutofit/>
-          </a:bodyPr>
-          <a:lstStyle>
-            <a:defPPr algn="r">
-              <a:defRPr sz="1650" b="1">
-                <a:solidFill>
-                  <a:srgbClr val="18323B"/>
-                </a:solidFill>
-                <a:latin typeface="Arial"/>
-                <a:ea typeface="Arial"/>
-                <a:cs typeface="Arial"/>
-              </a:defRPr>
-            </a:defPPr>
-          </a:lstStyle>
-          <a:p>
-            <a:pPr algn="r">
-              <a:lnSpc>
-                <a:spcPct val="105000"/>
-              </a:lnSpc>
-              <a:buNone/>
-              <a:defRPr sz="1650" b="1">
-                <a:solidFill>
-                  <a:srgbClr val="18323B"/>
-                </a:solidFill>
-                <a:latin typeface="Arial"/>
-                <a:ea typeface="Arial"/>
-                <a:cs typeface="Arial"/>
-              </a:defRPr>
-            </a:pPr>
-            <a:r>
-              <a:rPr sz="1650" b="1">
-                <a:solidFill>
-                  <a:srgbClr val="18323B"/>
-                </a:solidFill>
-                <a:latin typeface="Arial"/>
-                <a:ea typeface="Arial"/>
-                <a:cs typeface="Arial"/>
-              </a:rPr>
-              <a:t>88.72%</a:t>
-            </a:r>
-          </a:p>
-        </p:txBody>
-      </p:sp>
-      <p:sp>
-        <p:nvSpPr>
-          <p:cNvPr id="13" name="Rectángulo 12">
-            <a:extLst>
-              <a:ext uri="{FF2B5EF4-FFF2-40B4-BE49-F238E27FC236}">
-                <a16:creationId xmlns:a16="http://schemas.microsoft.com/office/drawing/2014/main" id="{62774BBC-2E5A-4293-85AB-0BF7CACE0E92}"/>
-              </a:ext>
-            </a:extLst>
-          </p:cNvPr>
-          <p:cNvSpPr>
-            <a:spLocks noGrp="1"/>
-          </p:cNvSpPr>
-          <p:nvPr/>
-        </p:nvSpPr>
-        <p:spPr>
-          <a:xfrm>
-            <a:off x="742950" y="2724150"/>
-            <a:ext cx="6381750" cy="9525"/>
-          </a:xfrm>
-          <a:prstGeom prst="rect">
-            <a:avLst/>
-          </a:prstGeom>
-          <a:solidFill>
-            <a:srgbClr val="C8D7D5"/>
-          </a:solidFill>
-          <a:ln w="0">
-            <a:noFill/>
-            <a:prstDash val="solid"/>
-          </a:ln>
-        </p:spPr>
-      </p:sp>
-      <p:sp>
-        <p:nvSpPr>
-          <p:cNvPr id="14" name="Rectángulo 13">
-            <a:extLst>
-              <a:ext uri="{FF2B5EF4-FFF2-40B4-BE49-F238E27FC236}">
-                <a16:creationId xmlns:a16="http://schemas.microsoft.com/office/drawing/2014/main" id="{7FB3AAE0-F771-461A-8ACD-CBE1B59D19AC}"/>
-              </a:ext>
-            </a:extLst>
-          </p:cNvPr>
-          <p:cNvSpPr>
-            <a:spLocks noGrp="1"/>
-          </p:cNvSpPr>
-          <p:nvPr/>
-        </p:nvSpPr>
-        <p:spPr>
-          <a:xfrm>
-            <a:off x="800100" y="2914650"/>
-            <a:ext cx="666750" cy="333375"/>
-          </a:xfrm>
-          <a:prstGeom prst="rect">
-            <a:avLst/>
-          </a:prstGeom>
-          <a:noFill/>
-          <a:ln w="0">
-            <a:noFill/>
-            <a:prstDash val="solid"/>
-          </a:ln>
-        </p:spPr>
-        <p:txBody>
-          <a:bodyPr wrap="square" lIns="0" tIns="0" rIns="0" bIns="0" anchor="t">
-            <a:normAutofit/>
-          </a:bodyPr>
-          <a:lstStyle>
-            <a:defPPr algn="l">
-              <a:defRPr sz="1650" b="1">
-                <a:solidFill>
-                  <a:srgbClr val="178C87"/>
-                </a:solidFill>
-                <a:latin typeface="Arial"/>
-                <a:ea typeface="Arial"/>
-                <a:cs typeface="Arial"/>
-              </a:defRPr>
-            </a:defPPr>
-          </a:lstStyle>
-          <a:p>
-            <a:pPr algn="l">
-              <a:lnSpc>
-                <a:spcPct val="105000"/>
-              </a:lnSpc>
-              <a:buNone/>
-              <a:defRPr sz="1650" b="1">
-                <a:solidFill>
-                  <a:srgbClr val="178C87"/>
-                </a:solidFill>
-                <a:latin typeface="Arial"/>
-                <a:ea typeface="Arial"/>
-                <a:cs typeface="Arial"/>
-              </a:defRPr>
-            </a:pPr>
-            <a:r>
-              <a:rPr sz="1650" b="1">
-                <a:solidFill>
-                  <a:srgbClr val="178C87"/>
-                </a:solidFill>
-                <a:latin typeface="Arial"/>
-                <a:ea typeface="Arial"/>
-                <a:cs typeface="Arial"/>
-              </a:rPr>
-              <a:t>A2</a:t>
-            </a:r>
-          </a:p>
-        </p:txBody>
-      </p:sp>
-      <p:sp>
-        <p:nvSpPr>
-          <p:cNvPr id="15" name="Rectángulo 14">
-            <a:extLst>
-              <a:ext uri="{FF2B5EF4-FFF2-40B4-BE49-F238E27FC236}">
-                <a16:creationId xmlns:a16="http://schemas.microsoft.com/office/drawing/2014/main" id="{9146BDDB-4BD4-47F8-A1F7-FC1334EA73E2}"/>
-              </a:ext>
-            </a:extLst>
-          </p:cNvPr>
-          <p:cNvSpPr>
-            <a:spLocks noGrp="1"/>
-          </p:cNvSpPr>
-          <p:nvPr/>
-        </p:nvSpPr>
-        <p:spPr>
-          <a:xfrm>
-            <a:off x="1619250" y="2914650"/>
-            <a:ext cx="3714750" cy="342900"/>
-          </a:xfrm>
-          <a:prstGeom prst="rect">
-            <a:avLst/>
-          </a:prstGeom>
-          <a:noFill/>
-          <a:ln w="0">
-            <a:noFill/>
-            <a:prstDash val="solid"/>
-          </a:ln>
-        </p:spPr>
-        <p:txBody>
-          <a:bodyPr wrap="square" lIns="0" tIns="0" rIns="0" bIns="0" anchor="t">
-            <a:normAutofit/>
-          </a:bodyPr>
-          <a:lstStyle>
-            <a:defPPr algn="l">
-              <a:defRPr sz="1575" b="0">
-                <a:solidFill>
-                  <a:srgbClr val="18323B"/>
-                </a:solidFill>
-                <a:latin typeface="Arial"/>
-                <a:ea typeface="Arial"/>
-                <a:cs typeface="Arial"/>
-              </a:defRPr>
-            </a:defPPr>
-          </a:lstStyle>
-          <a:p>
-            <a:pPr algn="l">
-              <a:lnSpc>
-                <a:spcPct val="105000"/>
-              </a:lnSpc>
-              <a:buNone/>
-              <a:defRPr sz="1575" b="0">
-                <a:solidFill>
-                  <a:srgbClr val="18323B"/>
-                </a:solidFill>
-                <a:latin typeface="Arial"/>
-                <a:ea typeface="Arial"/>
-                <a:cs typeface="Arial"/>
-              </a:defRPr>
-            </a:pPr>
-            <a:r>
-              <a:rPr sz="1575" b="0">
-                <a:solidFill>
-                  <a:srgbClr val="18323B"/>
-                </a:solidFill>
-                <a:latin typeface="Arial"/>
-                <a:ea typeface="Arial"/>
-                <a:cs typeface="Arial"/>
-              </a:rPr>
-              <a:t>CNN + BatchNorm</a:t>
-            </a:r>
-          </a:p>
-        </p:txBody>
-      </p:sp>
-      <p:sp>
-        <p:nvSpPr>
-          <p:cNvPr id="16" name="Rectángulo 15">
-            <a:extLst>
-              <a:ext uri="{FF2B5EF4-FFF2-40B4-BE49-F238E27FC236}">
-                <a16:creationId xmlns:a16="http://schemas.microsoft.com/office/drawing/2014/main" id="{18627089-14B0-44AB-878C-382937174F6B}"/>
-              </a:ext>
-            </a:extLst>
-          </p:cNvPr>
-          <p:cNvSpPr>
-            <a:spLocks noGrp="1"/>
-          </p:cNvSpPr>
-          <p:nvPr/>
-        </p:nvSpPr>
-        <p:spPr>
-          <a:xfrm>
-            <a:off x="5524500" y="2914650"/>
-            <a:ext cx="1428750" cy="342900"/>
-          </a:xfrm>
-          <a:prstGeom prst="rect">
-            <a:avLst/>
-          </a:prstGeom>
-          <a:noFill/>
-          <a:ln w="0">
-            <a:noFill/>
-            <a:prstDash val="solid"/>
-          </a:ln>
-        </p:spPr>
-        <p:txBody>
-          <a:bodyPr wrap="square" lIns="0" tIns="0" rIns="0" bIns="0" anchor="t">
-            <a:normAutofit/>
-          </a:bodyPr>
-          <a:lstStyle>
-            <a:defPPr algn="r">
-              <a:defRPr sz="1650" b="1">
-                <a:solidFill>
-                  <a:srgbClr val="18323B"/>
-                </a:solidFill>
-                <a:latin typeface="Arial"/>
-                <a:ea typeface="Arial"/>
-                <a:cs typeface="Arial"/>
-              </a:defRPr>
-            </a:defPPr>
-          </a:lstStyle>
-          <a:p>
-            <a:pPr algn="r">
-              <a:lnSpc>
-                <a:spcPct val="105000"/>
-              </a:lnSpc>
-              <a:buNone/>
-              <a:defRPr sz="1650" b="1">
-                <a:solidFill>
-                  <a:srgbClr val="18323B"/>
-                </a:solidFill>
-                <a:latin typeface="Arial"/>
-                <a:ea typeface="Arial"/>
-                <a:cs typeface="Arial"/>
-              </a:defRPr>
-            </a:pPr>
-            <a:r>
-              <a:rPr sz="1650" b="1">
-                <a:solidFill>
-                  <a:srgbClr val="18323B"/>
-                </a:solidFill>
-                <a:latin typeface="Arial"/>
-                <a:ea typeface="Arial"/>
-                <a:cs typeface="Arial"/>
-              </a:rPr>
-              <a:t>94.66%</a:t>
-            </a:r>
-          </a:p>
-        </p:txBody>
-      </p:sp>
-      <p:sp>
-        <p:nvSpPr>
-          <p:cNvPr id="17" name="Rectángulo 16">
-            <a:extLst>
-              <a:ext uri="{FF2B5EF4-FFF2-40B4-BE49-F238E27FC236}">
-                <a16:creationId xmlns:a16="http://schemas.microsoft.com/office/drawing/2014/main" id="{37DF8EDD-3C96-4ACF-9707-C22508D3AAA6}"/>
-              </a:ext>
-            </a:extLst>
-          </p:cNvPr>
-          <p:cNvSpPr>
-            <a:spLocks noGrp="1"/>
-          </p:cNvSpPr>
-          <p:nvPr/>
-        </p:nvSpPr>
-        <p:spPr>
-          <a:xfrm>
-            <a:off x="742950" y="3352800"/>
-            <a:ext cx="6381750" cy="9525"/>
-          </a:xfrm>
-          <a:prstGeom prst="rect">
-            <a:avLst/>
-          </a:prstGeom>
-          <a:solidFill>
-            <a:srgbClr val="C8D7D5"/>
-          </a:solidFill>
-          <a:ln w="0">
-            <a:noFill/>
-            <a:prstDash val="solid"/>
-          </a:ln>
-        </p:spPr>
-      </p:sp>
-      <p:sp>
-        <p:nvSpPr>
-          <p:cNvPr id="18" name="Rectángulo 17">
-            <a:extLst>
-              <a:ext uri="{FF2B5EF4-FFF2-40B4-BE49-F238E27FC236}">
-                <a16:creationId xmlns:a16="http://schemas.microsoft.com/office/drawing/2014/main" id="{78F0013B-D933-44DB-B456-09109A02EF33}"/>
-              </a:ext>
-            </a:extLst>
-          </p:cNvPr>
-          <p:cNvSpPr>
-            <a:spLocks noGrp="1"/>
-          </p:cNvSpPr>
-          <p:nvPr/>
-        </p:nvSpPr>
-        <p:spPr>
-          <a:xfrm>
-            <a:off x="800100" y="3543300"/>
-            <a:ext cx="666750" cy="333375"/>
-          </a:xfrm>
-          <a:prstGeom prst="rect">
-            <a:avLst/>
-          </a:prstGeom>
-          <a:noFill/>
-          <a:ln w="0">
-            <a:noFill/>
-            <a:prstDash val="solid"/>
-          </a:ln>
-        </p:spPr>
-        <p:txBody>
-          <a:bodyPr wrap="square" lIns="0" tIns="0" rIns="0" bIns="0" anchor="t">
-            <a:normAutofit/>
-          </a:bodyPr>
-          <a:lstStyle>
-            <a:defPPr algn="l">
-              <a:defRPr sz="1650" b="1">
-                <a:solidFill>
-                  <a:srgbClr val="C85E3A"/>
-                </a:solidFill>
-                <a:latin typeface="Arial"/>
-                <a:ea typeface="Arial"/>
-                <a:cs typeface="Arial"/>
-              </a:defRPr>
-            </a:defPPr>
-          </a:lstStyle>
-          <a:p>
-            <a:pPr algn="l">
-              <a:lnSpc>
-                <a:spcPct val="105000"/>
-              </a:lnSpc>
-              <a:buNone/>
-              <a:defRPr sz="1650" b="1">
-                <a:solidFill>
-                  <a:srgbClr val="C85E3A"/>
-                </a:solidFill>
-                <a:latin typeface="Arial"/>
-                <a:ea typeface="Arial"/>
-                <a:cs typeface="Arial"/>
-              </a:defRPr>
-            </a:pPr>
-            <a:r>
-              <a:rPr sz="1650" b="1">
-                <a:solidFill>
-                  <a:srgbClr val="C85E3A"/>
-                </a:solidFill>
-                <a:latin typeface="Arial"/>
-                <a:ea typeface="Arial"/>
-                <a:cs typeface="Arial"/>
-              </a:rPr>
-              <a:t>A3</a:t>
-            </a:r>
-          </a:p>
-        </p:txBody>
-      </p:sp>
-      <p:sp>
-        <p:nvSpPr>
-          <p:cNvPr id="19" name="Rectángulo 18">
-            <a:extLst>
-              <a:ext uri="{FF2B5EF4-FFF2-40B4-BE49-F238E27FC236}">
-                <a16:creationId xmlns:a16="http://schemas.microsoft.com/office/drawing/2014/main" id="{1F5BACE4-8F00-466D-91A6-AE60B6399FCB}"/>
-              </a:ext>
-            </a:extLst>
-          </p:cNvPr>
-          <p:cNvSpPr>
-            <a:spLocks noGrp="1"/>
-          </p:cNvSpPr>
-          <p:nvPr/>
-        </p:nvSpPr>
-        <p:spPr>
-          <a:xfrm>
-            <a:off x="1619250" y="3543300"/>
-            <a:ext cx="3714750" cy="342900"/>
-          </a:xfrm>
-          <a:prstGeom prst="rect">
-            <a:avLst/>
-          </a:prstGeom>
-          <a:noFill/>
-          <a:ln w="0">
-            <a:noFill/>
-            <a:prstDash val="solid"/>
-          </a:ln>
-        </p:spPr>
-        <p:txBody>
-          <a:bodyPr wrap="square" lIns="0" tIns="0" rIns="0" bIns="0" anchor="t">
-            <a:normAutofit/>
-          </a:bodyPr>
-          <a:lstStyle>
-            <a:defPPr algn="l">
-              <a:defRPr sz="1575" b="1">
-                <a:solidFill>
-                  <a:srgbClr val="C85E3A"/>
-                </a:solidFill>
-                <a:latin typeface="Arial"/>
-                <a:ea typeface="Arial"/>
-                <a:cs typeface="Arial"/>
-              </a:defRPr>
-            </a:defPPr>
-          </a:lstStyle>
-          <a:p>
-            <a:pPr algn="l">
-              <a:lnSpc>
-                <a:spcPct val="105000"/>
-              </a:lnSpc>
-              <a:buNone/>
-              <a:defRPr sz="1575" b="1">
-                <a:solidFill>
-                  <a:srgbClr val="C85E3A"/>
-                </a:solidFill>
-                <a:latin typeface="Arial"/>
-                <a:ea typeface="Arial"/>
-                <a:cs typeface="Arial"/>
-              </a:defRPr>
-            </a:pPr>
-            <a:r>
-              <a:rPr sz="1575" b="1">
-                <a:solidFill>
-                  <a:srgbClr val="C85E3A"/>
-                </a:solidFill>
-                <a:latin typeface="Arial"/>
-                <a:ea typeface="Arial"/>
-                <a:cs typeface="Arial"/>
-              </a:rPr>
-              <a:t>CNN + BatchNorm + Dropout</a:t>
-            </a:r>
-          </a:p>
-        </p:txBody>
-      </p:sp>
-      <p:sp>
-        <p:nvSpPr>
-          <p:cNvPr id="20" name="Rectángulo 19">
-            <a:extLst>
-              <a:ext uri="{FF2B5EF4-FFF2-40B4-BE49-F238E27FC236}">
-                <a16:creationId xmlns:a16="http://schemas.microsoft.com/office/drawing/2014/main" id="{E83A23E5-7B47-40F6-819E-72B07184CC3A}"/>
-              </a:ext>
-            </a:extLst>
-          </p:cNvPr>
-          <p:cNvSpPr>
-            <a:spLocks noGrp="1"/>
-          </p:cNvSpPr>
-          <p:nvPr/>
-        </p:nvSpPr>
-        <p:spPr>
-          <a:xfrm>
-            <a:off x="5524500" y="3543300"/>
-            <a:ext cx="1428750" cy="342900"/>
-          </a:xfrm>
-          <a:prstGeom prst="rect">
-            <a:avLst/>
-          </a:prstGeom>
-          <a:noFill/>
-          <a:ln w="0">
-            <a:noFill/>
-            <a:prstDash val="solid"/>
-          </a:ln>
-        </p:spPr>
-        <p:txBody>
-          <a:bodyPr wrap="square" lIns="0" tIns="0" rIns="0" bIns="0" anchor="t">
-            <a:normAutofit/>
-          </a:bodyPr>
-          <a:lstStyle>
-            <a:defPPr algn="r">
-              <a:defRPr sz="1650" b="1">
-                <a:solidFill>
-                  <a:srgbClr val="C85E3A"/>
-                </a:solidFill>
-                <a:latin typeface="Arial"/>
-                <a:ea typeface="Arial"/>
-                <a:cs typeface="Arial"/>
-              </a:defRPr>
-            </a:defPPr>
-          </a:lstStyle>
-          <a:p>
-            <a:pPr algn="r">
-              <a:lnSpc>
-                <a:spcPct val="105000"/>
-              </a:lnSpc>
-              <a:buNone/>
-              <a:defRPr sz="1650" b="1">
-                <a:solidFill>
-                  <a:srgbClr val="C85E3A"/>
-                </a:solidFill>
-                <a:latin typeface="Arial"/>
-                <a:ea typeface="Arial"/>
-                <a:cs typeface="Arial"/>
-              </a:defRPr>
-            </a:pPr>
-            <a:r>
-              <a:rPr sz="1650" b="1">
-                <a:solidFill>
-                  <a:srgbClr val="C85E3A"/>
-                </a:solidFill>
-                <a:latin typeface="Arial"/>
-                <a:ea typeface="Arial"/>
-                <a:cs typeface="Arial"/>
-              </a:rPr>
-              <a:t>94.82%</a:t>
-            </a:r>
-          </a:p>
-        </p:txBody>
-      </p:sp>
-      <p:sp>
-        <p:nvSpPr>
-          <p:cNvPr id="21" name="Rectángulo 20">
-            <a:extLst>
-              <a:ext uri="{FF2B5EF4-FFF2-40B4-BE49-F238E27FC236}">
-                <a16:creationId xmlns:a16="http://schemas.microsoft.com/office/drawing/2014/main" id="{239F7285-E5CB-4D21-9CA6-2DCB4A2F906A}"/>
-              </a:ext>
-            </a:extLst>
-          </p:cNvPr>
-          <p:cNvSpPr>
-            <a:spLocks noGrp="1"/>
-          </p:cNvSpPr>
-          <p:nvPr/>
-        </p:nvSpPr>
-        <p:spPr>
-          <a:xfrm>
-            <a:off x="742950" y="3981450"/>
-            <a:ext cx="6381750" cy="9525"/>
-          </a:xfrm>
-          <a:prstGeom prst="rect">
-            <a:avLst/>
-          </a:prstGeom>
-          <a:solidFill>
-            <a:srgbClr val="C8D7D5"/>
-          </a:solidFill>
-          <a:ln w="0">
-            <a:noFill/>
-            <a:prstDash val="solid"/>
-          </a:ln>
-        </p:spPr>
-      </p:sp>
-      <p:sp>
-        <p:nvSpPr>
-          <p:cNvPr id="22" name="Rectángulo 21">
-            <a:extLst>
-              <a:ext uri="{FF2B5EF4-FFF2-40B4-BE49-F238E27FC236}">
-                <a16:creationId xmlns:a16="http://schemas.microsoft.com/office/drawing/2014/main" id="{0F186571-471D-4AB4-85B5-FF8F7AF14E5D}"/>
-              </a:ext>
-            </a:extLst>
-          </p:cNvPr>
-          <p:cNvSpPr>
-            <a:spLocks noGrp="1"/>
-          </p:cNvSpPr>
-          <p:nvPr/>
-        </p:nvSpPr>
-        <p:spPr>
-          <a:xfrm>
-            <a:off x="800100" y="4171950"/>
-            <a:ext cx="666750" cy="333375"/>
-          </a:xfrm>
-          <a:prstGeom prst="rect">
-            <a:avLst/>
-          </a:prstGeom>
-          <a:noFill/>
-          <a:ln w="0">
-            <a:noFill/>
-            <a:prstDash val="solid"/>
-          </a:ln>
-        </p:spPr>
-        <p:txBody>
-          <a:bodyPr wrap="square" lIns="0" tIns="0" rIns="0" bIns="0" anchor="t">
-            <a:normAutofit/>
-          </a:bodyPr>
-          <a:lstStyle>
-            <a:defPPr algn="l">
-              <a:defRPr sz="1650" b="1">
-                <a:solidFill>
-                  <a:srgbClr val="178C87"/>
-                </a:solidFill>
-                <a:latin typeface="Arial"/>
-                <a:ea typeface="Arial"/>
-                <a:cs typeface="Arial"/>
-              </a:defRPr>
-            </a:defPPr>
-          </a:lstStyle>
-          <a:p>
-            <a:pPr algn="l">
-              <a:lnSpc>
-                <a:spcPct val="105000"/>
-              </a:lnSpc>
-              <a:buNone/>
-              <a:defRPr sz="1650" b="1">
-                <a:solidFill>
-                  <a:srgbClr val="178C87"/>
-                </a:solidFill>
-                <a:latin typeface="Arial"/>
-                <a:ea typeface="Arial"/>
-                <a:cs typeface="Arial"/>
-              </a:defRPr>
-            </a:pPr>
-            <a:r>
-              <a:rPr sz="1650" b="1">
-                <a:solidFill>
-                  <a:srgbClr val="178C87"/>
-                </a:solidFill>
-                <a:latin typeface="Arial"/>
-                <a:ea typeface="Arial"/>
-                <a:cs typeface="Arial"/>
-              </a:rPr>
-              <a:t>D1</a:t>
-            </a:r>
-          </a:p>
-        </p:txBody>
-      </p:sp>
-      <p:sp>
-        <p:nvSpPr>
-          <p:cNvPr id="23" name="Rectángulo 22">
-            <a:extLst>
-              <a:ext uri="{FF2B5EF4-FFF2-40B4-BE49-F238E27FC236}">
-                <a16:creationId xmlns:a16="http://schemas.microsoft.com/office/drawing/2014/main" id="{09B19737-2B6D-400D-B8ED-C0B4C4D85D45}"/>
-              </a:ext>
-            </a:extLst>
-          </p:cNvPr>
-          <p:cNvSpPr>
-            <a:spLocks noGrp="1"/>
-          </p:cNvSpPr>
-          <p:nvPr/>
-        </p:nvSpPr>
-        <p:spPr>
-          <a:xfrm>
-            <a:off x="1619250" y="4171950"/>
-            <a:ext cx="3714750" cy="342900"/>
-          </a:xfrm>
-          <a:prstGeom prst="rect">
-            <a:avLst/>
-          </a:prstGeom>
-          <a:noFill/>
-          <a:ln w="0">
-            <a:noFill/>
-            <a:prstDash val="solid"/>
-          </a:ln>
-        </p:spPr>
-        <p:txBody>
-          <a:bodyPr wrap="square" lIns="0" tIns="0" rIns="0" bIns="0" anchor="t">
-            <a:normAutofit/>
-          </a:bodyPr>
-          <a:lstStyle>
-            <a:defPPr algn="l">
-              <a:defRPr sz="1575" b="0">
-                <a:solidFill>
-                  <a:srgbClr val="18323B"/>
-                </a:solidFill>
-                <a:latin typeface="Arial"/>
-                <a:ea typeface="Arial"/>
-                <a:cs typeface="Arial"/>
-              </a:defRPr>
-            </a:defPPr>
-          </a:lstStyle>
-          <a:p>
-            <a:pPr algn="l">
-              <a:lnSpc>
-                <a:spcPct val="105000"/>
-              </a:lnSpc>
-              <a:buNone/>
-              <a:defRPr sz="1575" b="0">
-                <a:solidFill>
-                  <a:srgbClr val="18323B"/>
-                </a:solidFill>
-                <a:latin typeface="Arial"/>
-                <a:ea typeface="Arial"/>
-                <a:cs typeface="Arial"/>
-              </a:defRPr>
-            </a:pPr>
-            <a:r>
-              <a:rPr sz="1575" b="0">
-                <a:solidFill>
-                  <a:srgbClr val="18323B"/>
-                </a:solidFill>
-                <a:latin typeface="Arial"/>
-                <a:ea typeface="Arial"/>
-                <a:cs typeface="Arial"/>
-              </a:rPr>
-              <a:t>CNN + Dropout</a:t>
-            </a:r>
-          </a:p>
-        </p:txBody>
-      </p:sp>
-      <p:sp>
-        <p:nvSpPr>
-          <p:cNvPr id="24" name="Rectángulo 23">
-            <a:extLst>
-              <a:ext uri="{FF2B5EF4-FFF2-40B4-BE49-F238E27FC236}">
-                <a16:creationId xmlns:a16="http://schemas.microsoft.com/office/drawing/2014/main" id="{B78B350C-51D1-474C-BA4E-2E92B1ACBEC9}"/>
-              </a:ext>
-            </a:extLst>
-          </p:cNvPr>
-          <p:cNvSpPr>
-            <a:spLocks noGrp="1"/>
-          </p:cNvSpPr>
-          <p:nvPr/>
-        </p:nvSpPr>
-        <p:spPr>
-          <a:xfrm>
-            <a:off x="5524500" y="4171950"/>
-            <a:ext cx="1428750" cy="342900"/>
-          </a:xfrm>
-          <a:prstGeom prst="rect">
-            <a:avLst/>
-          </a:prstGeom>
-          <a:noFill/>
-          <a:ln w="0">
-            <a:noFill/>
-            <a:prstDash val="solid"/>
-          </a:ln>
-        </p:spPr>
-        <p:txBody>
-          <a:bodyPr wrap="square" lIns="0" tIns="0" rIns="0" bIns="0" anchor="t">
-            <a:normAutofit/>
-          </a:bodyPr>
-          <a:lstStyle>
-            <a:defPPr algn="r">
-              <a:defRPr sz="1650" b="1">
-                <a:solidFill>
-                  <a:srgbClr val="18323B"/>
-                </a:solidFill>
-                <a:latin typeface="Arial"/>
-                <a:ea typeface="Arial"/>
-                <a:cs typeface="Arial"/>
-              </a:defRPr>
-            </a:defPPr>
-          </a:lstStyle>
-          <a:p>
-            <a:pPr algn="r">
-              <a:lnSpc>
-                <a:spcPct val="105000"/>
-              </a:lnSpc>
-              <a:buNone/>
-              <a:defRPr sz="1650" b="1">
-                <a:solidFill>
-                  <a:srgbClr val="18323B"/>
-                </a:solidFill>
-                <a:latin typeface="Arial"/>
-                <a:ea typeface="Arial"/>
-                <a:cs typeface="Arial"/>
-              </a:defRPr>
-            </a:pPr>
-            <a:r>
-              <a:rPr sz="1650" b="1">
-                <a:solidFill>
-                  <a:srgbClr val="18323B"/>
-                </a:solidFill>
-                <a:latin typeface="Arial"/>
-                <a:ea typeface="Arial"/>
-                <a:cs typeface="Arial"/>
-              </a:rPr>
-              <a:t>88.83%</a:t>
-            </a:r>
-          </a:p>
-        </p:txBody>
-      </p:sp>
-      <p:sp>
-        <p:nvSpPr>
-          <p:cNvPr id="25" name="Rectángulo 24">
-            <a:extLst>
-              <a:ext uri="{FF2B5EF4-FFF2-40B4-BE49-F238E27FC236}">
-                <a16:creationId xmlns:a16="http://schemas.microsoft.com/office/drawing/2014/main" id="{51D09DF6-47E0-42FD-9FAC-059C12FB758C}"/>
-              </a:ext>
-            </a:extLst>
-          </p:cNvPr>
-          <p:cNvSpPr>
-            <a:spLocks noGrp="1"/>
-          </p:cNvSpPr>
-          <p:nvPr/>
-        </p:nvSpPr>
-        <p:spPr>
-          <a:xfrm>
-            <a:off x="742950" y="4610100"/>
-            <a:ext cx="6381750" cy="9525"/>
-          </a:xfrm>
-          <a:prstGeom prst="rect">
-            <a:avLst/>
-          </a:prstGeom>
-          <a:solidFill>
-            <a:srgbClr val="C8D7D5"/>
-          </a:solidFill>
-          <a:ln w="0">
-            <a:noFill/>
-            <a:prstDash val="solid"/>
-          </a:ln>
-        </p:spPr>
-      </p:sp>
-      <p:sp>
-        <p:nvSpPr>
-          <p:cNvPr id="26" name="Rectángulo 25">
-            <a:extLst>
-              <a:ext uri="{FF2B5EF4-FFF2-40B4-BE49-F238E27FC236}">
-                <a16:creationId xmlns:a16="http://schemas.microsoft.com/office/drawing/2014/main" id="{CF28B05A-28A5-4382-B796-9F0C77003AF3}"/>
-              </a:ext>
-            </a:extLst>
-          </p:cNvPr>
-          <p:cNvSpPr>
-            <a:spLocks noGrp="1"/>
-          </p:cNvSpPr>
-          <p:nvPr/>
-        </p:nvSpPr>
-        <p:spPr>
-          <a:xfrm>
-            <a:off x="800100" y="4800600"/>
-            <a:ext cx="666750" cy="333375"/>
-          </a:xfrm>
-          <a:prstGeom prst="rect">
-            <a:avLst/>
-          </a:prstGeom>
-          <a:noFill/>
-          <a:ln w="0">
-            <a:noFill/>
-            <a:prstDash val="solid"/>
-          </a:ln>
-        </p:spPr>
-        <p:txBody>
-          <a:bodyPr wrap="square" lIns="0" tIns="0" rIns="0" bIns="0" anchor="t">
-            <a:normAutofit/>
-          </a:bodyPr>
-          <a:lstStyle>
-            <a:defPPr algn="l">
-              <a:defRPr sz="1650" b="1">
-                <a:solidFill>
-                  <a:srgbClr val="178C87"/>
-                </a:solidFill>
-                <a:latin typeface="Arial"/>
-                <a:ea typeface="Arial"/>
-                <a:cs typeface="Arial"/>
-              </a:defRPr>
-            </a:defPPr>
-          </a:lstStyle>
-          <a:p>
-            <a:pPr algn="l">
-              <a:lnSpc>
-                <a:spcPct val="105000"/>
-              </a:lnSpc>
-              <a:buNone/>
-              <a:defRPr sz="1650" b="1">
-                <a:solidFill>
-                  <a:srgbClr val="178C87"/>
-                </a:solidFill>
-                <a:latin typeface="Arial"/>
-                <a:ea typeface="Arial"/>
-                <a:cs typeface="Arial"/>
-              </a:defRPr>
-            </a:pPr>
-            <a:r>
-              <a:rPr sz="1650" b="1">
-                <a:solidFill>
-                  <a:srgbClr val="178C87"/>
-                </a:solidFill>
-                <a:latin typeface="Arial"/>
-                <a:ea typeface="Arial"/>
-                <a:cs typeface="Arial"/>
-              </a:rPr>
-              <a:t>C1</a:t>
-            </a:r>
-          </a:p>
-        </p:txBody>
-      </p:sp>
-      <p:sp>
-        <p:nvSpPr>
-          <p:cNvPr id="27" name="Rectángulo 26">
-            <a:extLst>
-              <a:ext uri="{FF2B5EF4-FFF2-40B4-BE49-F238E27FC236}">
-                <a16:creationId xmlns:a16="http://schemas.microsoft.com/office/drawing/2014/main" id="{DAAFC40A-CF39-4955-B594-F4D16AC8D50E}"/>
-              </a:ext>
-            </a:extLst>
-          </p:cNvPr>
-          <p:cNvSpPr>
-            <a:spLocks noGrp="1"/>
-          </p:cNvSpPr>
-          <p:nvPr/>
-        </p:nvSpPr>
-        <p:spPr>
-          <a:xfrm>
-            <a:off x="1619250" y="4800600"/>
-            <a:ext cx="3714750" cy="342900"/>
-          </a:xfrm>
-          <a:prstGeom prst="rect">
-            <a:avLst/>
-          </a:prstGeom>
-          <a:noFill/>
-          <a:ln w="0">
-            <a:noFill/>
-            <a:prstDash val="solid"/>
-          </a:ln>
-        </p:spPr>
-        <p:txBody>
-          <a:bodyPr wrap="square" lIns="0" tIns="0" rIns="0" bIns="0" anchor="t">
-            <a:normAutofit/>
-          </a:bodyPr>
-          <a:lstStyle>
-            <a:defPPr algn="l">
-              <a:defRPr sz="1575" b="0">
-                <a:solidFill>
-                  <a:srgbClr val="18323B"/>
-                </a:solidFill>
-                <a:latin typeface="Arial"/>
-                <a:ea typeface="Arial"/>
-                <a:cs typeface="Arial"/>
-              </a:defRPr>
-            </a:defPPr>
-          </a:lstStyle>
-          <a:p>
-            <a:pPr algn="l">
-              <a:lnSpc>
-                <a:spcPct val="105000"/>
-              </a:lnSpc>
-              <a:buNone/>
-              <a:defRPr sz="1575" b="0">
-                <a:solidFill>
-                  <a:srgbClr val="18323B"/>
-                </a:solidFill>
-                <a:latin typeface="Arial"/>
-                <a:ea typeface="Arial"/>
-                <a:cs typeface="Arial"/>
-              </a:defRPr>
-            </a:pPr>
-            <a:r>
-              <a:rPr sz="1575" b="0">
-                <a:solidFill>
-                  <a:srgbClr val="18323B"/>
-                </a:solidFill>
-                <a:latin typeface="Arial"/>
-                <a:ea typeface="Arial"/>
-                <a:cs typeface="Arial"/>
-              </a:rPr>
-              <a:t>CNN base, LR 0.0003</a:t>
-            </a:r>
-          </a:p>
-        </p:txBody>
-      </p:sp>
-      <p:sp>
-        <p:nvSpPr>
-          <p:cNvPr id="28" name="Rectángulo 27">
-            <a:extLst>
-              <a:ext uri="{FF2B5EF4-FFF2-40B4-BE49-F238E27FC236}">
-                <a16:creationId xmlns:a16="http://schemas.microsoft.com/office/drawing/2014/main" id="{41C7F9E8-E837-40E6-913A-635331FE347E}"/>
-              </a:ext>
-            </a:extLst>
-          </p:cNvPr>
-          <p:cNvSpPr>
-            <a:spLocks noGrp="1"/>
-          </p:cNvSpPr>
-          <p:nvPr/>
-        </p:nvSpPr>
-        <p:spPr>
-          <a:xfrm>
-            <a:off x="5524500" y="4800600"/>
-            <a:ext cx="1428750" cy="342900"/>
-          </a:xfrm>
-          <a:prstGeom prst="rect">
-            <a:avLst/>
-          </a:prstGeom>
-          <a:noFill/>
-          <a:ln w="0">
-            <a:noFill/>
-            <a:prstDash val="solid"/>
-          </a:ln>
-        </p:spPr>
-        <p:txBody>
-          <a:bodyPr wrap="square" lIns="0" tIns="0" rIns="0" bIns="0" anchor="t">
-            <a:normAutofit/>
-          </a:bodyPr>
-          <a:lstStyle>
-            <a:defPPr algn="r">
-              <a:defRPr sz="1650" b="1">
-                <a:solidFill>
-                  <a:srgbClr val="18323B"/>
-                </a:solidFill>
-                <a:latin typeface="Arial"/>
-                <a:ea typeface="Arial"/>
-                <a:cs typeface="Arial"/>
-              </a:defRPr>
-            </a:defPPr>
-          </a:lstStyle>
-          <a:p>
-            <a:pPr algn="r">
-              <a:lnSpc>
-                <a:spcPct val="105000"/>
-              </a:lnSpc>
-              <a:buNone/>
-              <a:defRPr sz="1650" b="1">
-                <a:solidFill>
-                  <a:srgbClr val="18323B"/>
-                </a:solidFill>
-                <a:latin typeface="Arial"/>
-                <a:ea typeface="Arial"/>
-                <a:cs typeface="Arial"/>
-              </a:defRPr>
-            </a:pPr>
-            <a:r>
-              <a:rPr sz="1650" b="1">
-                <a:solidFill>
-                  <a:srgbClr val="18323B"/>
-                </a:solidFill>
-                <a:latin typeface="Arial"/>
-                <a:ea typeface="Arial"/>
-                <a:cs typeface="Arial"/>
-              </a:rPr>
-              <a:t>81.93%</a:t>
-            </a:r>
-          </a:p>
-        </p:txBody>
-      </p:sp>
-      <p:sp>
-        <p:nvSpPr>
-          <p:cNvPr id="29" name="Rectángulo 28">
-            <a:extLst>
-              <a:ext uri="{FF2B5EF4-FFF2-40B4-BE49-F238E27FC236}">
-                <a16:creationId xmlns:a16="http://schemas.microsoft.com/office/drawing/2014/main" id="{4B126592-C54D-4B71-A76E-0B7D0DB6BC85}"/>
-              </a:ext>
-            </a:extLst>
-          </p:cNvPr>
-          <p:cNvSpPr>
-            <a:spLocks noGrp="1"/>
-          </p:cNvSpPr>
-          <p:nvPr/>
-        </p:nvSpPr>
-        <p:spPr>
-          <a:xfrm>
-            <a:off x="742950" y="5238750"/>
-            <a:ext cx="6381750" cy="9525"/>
-          </a:xfrm>
-          <a:prstGeom prst="rect">
-            <a:avLst/>
-          </a:prstGeom>
-          <a:solidFill>
-            <a:srgbClr val="C8D7D5"/>
-          </a:solidFill>
-          <a:ln w="0">
-            <a:noFill/>
-            <a:prstDash val="solid"/>
-          </a:ln>
-        </p:spPr>
-      </p:sp>
-      <p:sp>
-        <p:nvSpPr>
-          <p:cNvPr id="30" name="Rectángulo 29">
-            <a:extLst>
-              <a:ext uri="{FF2B5EF4-FFF2-40B4-BE49-F238E27FC236}">
-                <a16:creationId xmlns:a16="http://schemas.microsoft.com/office/drawing/2014/main" id="{BB2832B5-5F65-48F0-8B66-5DB01BBC691B}"/>
-              </a:ext>
-            </a:extLst>
-          </p:cNvPr>
-          <p:cNvSpPr>
-            <a:spLocks noGrp="1"/>
-          </p:cNvSpPr>
-          <p:nvPr/>
-        </p:nvSpPr>
-        <p:spPr>
-          <a:xfrm>
-            <a:off x="7724775" y="1790700"/>
-            <a:ext cx="19050" cy="3562350"/>
-          </a:xfrm>
-          <a:prstGeom prst="rect">
-            <a:avLst/>
-          </a:prstGeom>
-          <a:solidFill>
-            <a:srgbClr val="C8D7D5"/>
-          </a:solidFill>
-          <a:ln w="0">
-            <a:noFill/>
-            <a:prstDash val="solid"/>
-          </a:ln>
-        </p:spPr>
-      </p:sp>
-      <p:sp>
-        <p:nvSpPr>
-          <p:cNvPr id="31" name="Rectángulo 30">
-            <a:extLst>
-              <a:ext uri="{FF2B5EF4-FFF2-40B4-BE49-F238E27FC236}">
-                <a16:creationId xmlns:a16="http://schemas.microsoft.com/office/drawing/2014/main" id="{247C4442-2B4F-438D-B499-D0A92B8DA58B}"/>
-              </a:ext>
-            </a:extLst>
-          </p:cNvPr>
-          <p:cNvSpPr>
-            <a:spLocks noGrp="1"/>
-          </p:cNvSpPr>
-          <p:nvPr/>
-        </p:nvSpPr>
-        <p:spPr>
-          <a:xfrm>
-            <a:off x="8058150" y="1895475"/>
-            <a:ext cx="2952750" cy="647700"/>
-          </a:xfrm>
-          <a:prstGeom prst="rect">
-            <a:avLst/>
-          </a:prstGeom>
-          <a:noFill/>
-          <a:ln w="0">
-            <a:noFill/>
-            <a:prstDash val="solid"/>
-          </a:ln>
-        </p:spPr>
-        <p:txBody>
-          <a:bodyPr wrap="square" lIns="0" tIns="0" rIns="0" bIns="0" anchor="t">
-            <a:normAutofit/>
-          </a:bodyPr>
-          <a:lstStyle>
-            <a:defPPr algn="l">
-              <a:defRPr sz="3600" b="1">
-                <a:solidFill>
-                  <a:srgbClr val="C85E3A"/>
-                </a:solidFill>
-                <a:latin typeface="Arial"/>
-                <a:ea typeface="Arial"/>
-                <a:cs typeface="Arial"/>
-              </a:defRPr>
-            </a:defPPr>
-          </a:lstStyle>
-          <a:p>
-            <a:pPr algn="l">
-              <a:lnSpc>
-                <a:spcPct val="105000"/>
-              </a:lnSpc>
-              <a:buNone/>
-              <a:defRPr sz="3600" b="1">
-                <a:solidFill>
-                  <a:srgbClr val="C85E3A"/>
-                </a:solidFill>
-                <a:latin typeface="Arial"/>
-                <a:ea typeface="Arial"/>
-                <a:cs typeface="Arial"/>
-              </a:defRPr>
-            </a:pPr>
-            <a:r>
-              <a:rPr sz="3600" b="1">
-                <a:solidFill>
-                  <a:srgbClr val="C85E3A"/>
-                </a:solidFill>
-                <a:latin typeface="Arial"/>
-                <a:ea typeface="Arial"/>
-                <a:cs typeface="Arial"/>
-              </a:rPr>
-              <a:t>94.82%</a:t>
-            </a:r>
-          </a:p>
-        </p:txBody>
-      </p:sp>
-      <p:sp>
-        <p:nvSpPr>
-          <p:cNvPr id="32" name="Rectángulo 31">
-            <a:extLst>
-              <a:ext uri="{FF2B5EF4-FFF2-40B4-BE49-F238E27FC236}">
-                <a16:creationId xmlns:a16="http://schemas.microsoft.com/office/drawing/2014/main" id="{E138D840-A461-4444-9D81-3D57EEC74EFB}"/>
-              </a:ext>
-            </a:extLst>
-          </p:cNvPr>
-          <p:cNvSpPr>
-            <a:spLocks noGrp="1"/>
-          </p:cNvSpPr>
-          <p:nvPr/>
-        </p:nvSpPr>
-        <p:spPr>
-          <a:xfrm>
-            <a:off x="8086725" y="2571750"/>
-            <a:ext cx="3143250" cy="523875"/>
-          </a:xfrm>
-          <a:prstGeom prst="rect">
-            <a:avLst/>
-          </a:prstGeom>
-          <a:noFill/>
-          <a:ln w="0">
-            <a:noFill/>
-            <a:prstDash val="solid"/>
-          </a:ln>
-        </p:spPr>
-        <p:txBody>
-          <a:bodyPr wrap="square" lIns="0" tIns="0" rIns="0" bIns="0" anchor="t">
-            <a:normAutofit fontScale="94893"/>
-          </a:bodyPr>
-          <a:lstStyle>
-            <a:defPPr algn="l">
-              <a:defRPr sz="1725" b="1">
-                <a:solidFill>
-                  <a:srgbClr val="102A36"/>
-                </a:solidFill>
-                <a:latin typeface="Arial"/>
-                <a:ea typeface="Arial"/>
-                <a:cs typeface="Arial"/>
-              </a:defRPr>
-            </a:defPPr>
-          </a:lstStyle>
-          <a:p>
-            <a:pPr algn="l">
-              <a:lnSpc>
-                <a:spcPct val="105000"/>
-              </a:lnSpc>
-              <a:buNone/>
-              <a:defRPr sz="1725" b="1">
-                <a:solidFill>
-                  <a:srgbClr val="102A36"/>
-                </a:solidFill>
-                <a:latin typeface="Arial"/>
-                <a:ea typeface="Arial"/>
-                <a:cs typeface="Arial"/>
-              </a:defRPr>
-            </a:pPr>
-            <a:r>
-              <a:rPr sz="1725" b="1">
-                <a:solidFill>
-                  <a:srgbClr val="102A36"/>
-                </a:solidFill>
-                <a:latin typeface="Arial"/>
-                <a:ea typeface="Arial"/>
-                <a:cs typeface="Arial"/>
-              </a:rPr>
-              <a:t>A3 · mejor macro-F1 de validación</a:t>
-            </a:r>
-          </a:p>
-        </p:txBody>
-      </p:sp>
-      <p:sp>
-        <p:nvSpPr>
-          <p:cNvPr id="33" name="Rectángulo 32">
-            <a:extLst>
-              <a:ext uri="{FF2B5EF4-FFF2-40B4-BE49-F238E27FC236}">
-                <a16:creationId xmlns:a16="http://schemas.microsoft.com/office/drawing/2014/main" id="{145C9109-8832-449A-84E4-D57C7991E869}"/>
-              </a:ext>
-            </a:extLst>
-          </p:cNvPr>
-          <p:cNvSpPr>
-            <a:spLocks noGrp="1"/>
-          </p:cNvSpPr>
-          <p:nvPr/>
-        </p:nvSpPr>
-        <p:spPr>
-          <a:xfrm>
-            <a:off x="8086725" y="3314700"/>
-            <a:ext cx="3143250" cy="933450"/>
-          </a:xfrm>
-          <a:prstGeom prst="rect">
-            <a:avLst/>
-          </a:prstGeom>
-          <a:noFill/>
-          <a:ln w="0">
-            <a:noFill/>
-            <a:prstDash val="solid"/>
-          </a:ln>
-        </p:spPr>
-        <p:txBody>
-          <a:bodyPr wrap="square" lIns="0" tIns="0" rIns="0" bIns="0" anchor="t">
-            <a:normAutofit/>
-          </a:bodyPr>
-          <a:lstStyle>
-            <a:defPPr algn="l">
-              <a:defRPr sz="1575" b="0">
-                <a:solidFill>
-                  <a:srgbClr val="18323B"/>
-                </a:solidFill>
-                <a:latin typeface="Arial"/>
-                <a:ea typeface="Arial"/>
-                <a:cs typeface="Arial"/>
-              </a:defRPr>
-            </a:defPPr>
-          </a:lstStyle>
-          <a:p>
-            <a:pPr algn="l">
-              <a:lnSpc>
-                <a:spcPct val="114000"/>
-              </a:lnSpc>
-              <a:buNone/>
-              <a:defRPr sz="1575" b="0">
-                <a:solidFill>
-                  <a:srgbClr val="18323B"/>
-                </a:solidFill>
-                <a:latin typeface="Arial"/>
-                <a:ea typeface="Arial"/>
-                <a:cs typeface="Arial"/>
-              </a:defRPr>
-            </a:pPr>
-            <a:r>
-              <a:rPr sz="1575" b="0">
-                <a:solidFill>
-                  <a:srgbClr val="18323B"/>
-                </a:solidFill>
-                <a:latin typeface="Arial"/>
-                <a:ea typeface="Arial"/>
-                <a:cs typeface="Arial"/>
-              </a:rPr>
-              <a:t>A2 quedó muy cerca: 94.66%. La diferencia entre ambos fue de 0.17 puntos porcentuales.</a:t>
-            </a:r>
-          </a:p>
-        </p:txBody>
-      </p:sp>
-      <p:sp>
-        <p:nvSpPr>
-          <p:cNvPr id="34" name="Rectángulo 33">
-            <a:extLst>
-              <a:ext uri="{FF2B5EF4-FFF2-40B4-BE49-F238E27FC236}">
-                <a16:creationId xmlns:a16="http://schemas.microsoft.com/office/drawing/2014/main" id="{0C153626-37E5-4AE3-BB7F-248A945CDA6E}"/>
-              </a:ext>
-            </a:extLst>
-          </p:cNvPr>
-          <p:cNvSpPr>
-            <a:spLocks noGrp="1"/>
-          </p:cNvSpPr>
-          <p:nvPr/>
-        </p:nvSpPr>
-        <p:spPr>
-          <a:xfrm>
-            <a:off x="8086725" y="4514850"/>
-            <a:ext cx="3143250" cy="1047750"/>
-          </a:xfrm>
-          <a:prstGeom prst="rect">
-            <a:avLst/>
-          </a:prstGeom>
-          <a:noFill/>
-          <a:ln w="0">
-            <a:noFill/>
-            <a:prstDash val="solid"/>
-          </a:ln>
-        </p:spPr>
-        <p:txBody>
-          <a:bodyPr wrap="square" lIns="0" tIns="0" rIns="0" bIns="0" anchor="t">
-            <a:normAutofit fontScale="95725"/>
-          </a:bodyPr>
-          <a:lstStyle>
-            <a:defPPr algn="l">
-              <a:defRPr sz="1575" b="0">
-                <a:solidFill>
-                  <a:srgbClr val="536C73"/>
-                </a:solidFill>
-                <a:latin typeface="Arial"/>
-                <a:ea typeface="Arial"/>
-                <a:cs typeface="Arial"/>
-              </a:defRPr>
-            </a:defPPr>
-          </a:lstStyle>
-          <a:p>
-            <a:pPr algn="l">
-              <a:lnSpc>
-                <a:spcPct val="114000"/>
-              </a:lnSpc>
-              <a:buNone/>
-              <a:defRPr sz="1575" b="0">
-                <a:solidFill>
-                  <a:srgbClr val="536C73"/>
-                </a:solidFill>
-                <a:latin typeface="Arial"/>
-                <a:ea typeface="Arial"/>
-                <a:cs typeface="Arial"/>
-              </a:defRPr>
-            </a:pPr>
-            <a:r>
-              <a:rPr sz="1575" b="0">
-                <a:solidFill>
-                  <a:srgbClr val="536C73"/>
-                </a:solidFill>
-                <a:latin typeface="Arial"/>
-                <a:ea typeface="Arial"/>
-                <a:cs typeface="Arial"/>
-              </a:rPr>
-              <a:t>A2 y A3 superaron a la CNN base. D1 quedó casi al nivel de A1. C1 no alcanzó ese desempeño en 40 épocas.</a:t>
-            </a:r>
-          </a:p>
-        </p:txBody>
-      </p:sp>
+      <p:pic>
+        <p:nvPicPr>
+          <p:cNvPr id="7" name="Imagen 6">
+            <a:extLst>
+              <a:ext uri="{FF2B5EF4-FFF2-40B4-BE49-F238E27FC236}">
+                <a16:creationId xmlns:a16="http://schemas.microsoft.com/office/drawing/2014/main" id="{340B7E76-F876-44DA-A1A7-28F998F854B8}"/>
+              </a:ext>
+            </a:extLst>
+          </p:cNvPr>
+          <p:cNvPicPr>
+            <a:picLocks noChangeAspect="1"/>
+          </p:cNvPicPr>
+          <p:nvPr/>
+        </p:nvPicPr>
+        <p:blipFill>
+          <a:blip r:embed="rId3"/>
+          <a:stretch/>
+        </p:blipFill>
+        <p:spPr>
+          <a:xfrm>
+            <a:off x="723900" y="1651289"/>
+            <a:ext cx="10668000" cy="3879273"/>
+          </a:xfrm>
+          <a:prstGeom prst="rect">
+            <a:avLst/>
+          </a:prstGeom>
+        </p:spPr>
+      </p:pic>
     </p:spTree>
     <p:extLst>
       <p:ext uri="{BB962C8B-B14F-4D97-AF65-F5344CB8AC3E}">
-        <p14:creationId xmlns:p14="http://schemas.microsoft.com/office/powerpoint/2010/main" val="118541337"/>
+        <p14:creationId xmlns:p14="http://schemas.microsoft.com/office/powerpoint/2010/main" val="1075283692"/>
       </p:ext>
     </p:extLst>
   </p:cSld>
@@ -16776,7 +15062,7 @@
           <p:cNvPr id="8" name="Rectángulo 7">
             <a:extLst>
               <a:ext uri="{FF2B5EF4-FFF2-40B4-BE49-F238E27FC236}">
-                <a16:creationId xmlns:a16="http://schemas.microsoft.com/office/drawing/2014/main" id="{330FE892-0469-4620-B433-ED049E05445D}"/>
+                <a16:creationId xmlns:a16="http://schemas.microsoft.com/office/drawing/2014/main" id="{98C3CCFB-44BA-413E-AAA3-8BA1BFA405B7}"/>
               </a:ext>
             </a:extLst>
           </p:cNvPr>
@@ -16807,7 +15093,7 @@
           <p:cNvPr id="2" name="Rectángulo 1">
             <a:extLst>
               <a:ext uri="{FF2B5EF4-FFF2-40B4-BE49-F238E27FC236}">
-                <a16:creationId xmlns:a16="http://schemas.microsoft.com/office/drawing/2014/main" id="{420D2906-37C7-41E6-AD0E-DC7BB9F24F69}"/>
+                <a16:creationId xmlns:a16="http://schemas.microsoft.com/office/drawing/2014/main" id="{145C295A-522E-4F2D-95D9-02A230C098FF}"/>
               </a:ext>
             </a:extLst>
           </p:cNvPr>
@@ -16870,7 +15156,7 @@
                 <a:ea typeface="Arial"/>
                 <a:cs typeface="Arial"/>
               </a:rPr>
-              <a:t>A1 · CNN base</a:t>
+              <a:t>A2 · CNN + BatchNorm</a:t>
             </a:r>
           </a:p>
         </p:txBody>
@@ -16880,7 +15166,7 @@
           <p:cNvPr id="3" name="Rectángulo 2">
             <a:extLst>
               <a:ext uri="{FF2B5EF4-FFF2-40B4-BE49-F238E27FC236}">
-                <a16:creationId xmlns:a16="http://schemas.microsoft.com/office/drawing/2014/main" id="{630B6962-004B-40D4-B97D-4282FE2215CD}"/>
+                <a16:creationId xmlns:a16="http://schemas.microsoft.com/office/drawing/2014/main" id="{635A9FC6-3B79-49C2-9868-874C2E34BC9F}"/>
               </a:ext>
             </a:extLst>
           </p:cNvPr>
@@ -16953,7 +15239,7 @@
           <p:cNvPr id="4" name="Rectángulo 3">
             <a:extLst>
               <a:ext uri="{FF2B5EF4-FFF2-40B4-BE49-F238E27FC236}">
-                <a16:creationId xmlns:a16="http://schemas.microsoft.com/office/drawing/2014/main" id="{11B4F2C6-3D94-4836-92E6-26E8D8175BE7}"/>
+                <a16:creationId xmlns:a16="http://schemas.microsoft.com/office/drawing/2014/main" id="{90544E1A-E3D4-46DE-AF9F-0AD87926BBDD}"/>
               </a:ext>
             </a:extLst>
           </p:cNvPr>
@@ -16984,7 +15270,7 @@
           <p:cNvPr id="5" name="Rectángulo 4">
             <a:extLst>
               <a:ext uri="{FF2B5EF4-FFF2-40B4-BE49-F238E27FC236}">
-                <a16:creationId xmlns:a16="http://schemas.microsoft.com/office/drawing/2014/main" id="{2FC95683-CC0B-43CA-8E3A-CB68B60288DA}"/>
+                <a16:creationId xmlns:a16="http://schemas.microsoft.com/office/drawing/2014/main" id="{B96A0AD3-8933-4B27-855C-3F57904A36DC}"/>
               </a:ext>
             </a:extLst>
           </p:cNvPr>
@@ -17057,7 +15343,7 @@
           <p:cNvPr id="6" name="Rectángulo 5">
             <a:extLst>
               <a:ext uri="{FF2B5EF4-FFF2-40B4-BE49-F238E27FC236}">
-                <a16:creationId xmlns:a16="http://schemas.microsoft.com/office/drawing/2014/main" id="{95E1F60E-5E28-44D4-A335-4E9A13C49A0F}"/>
+                <a16:creationId xmlns:a16="http://schemas.microsoft.com/office/drawing/2014/main" id="{CD857B0A-AE99-4D7C-9AEB-6158D60F497C}"/>
               </a:ext>
             </a:extLst>
           </p:cNvPr>
@@ -17112,7 +15398,7 @@
               </a:defRPr>
             </a:pPr>
             <a:r>
-              <a:rPr sz="1200" b="1" dirty="0">
+              <a:rPr lang="es-MX" sz="1200" b="1">
                 <a:solidFill>
                   <a:srgbClr val="178C87"/>
                 </a:solidFill>
@@ -17120,27 +15406,8 @@
                 <a:ea typeface="Arial"/>
                 <a:cs typeface="Arial"/>
               </a:rPr>
-              <a:t>0</a:t>
-            </a:r>
-            <a:r>
-              <a:rPr lang="es-MX" sz="1200" b="1" dirty="0">
-                <a:solidFill>
-                  <a:srgbClr val="178C87"/>
-                </a:solidFill>
-                <a:latin typeface="Arial"/>
-                <a:ea typeface="Arial"/>
-                <a:cs typeface="Arial"/>
-              </a:rPr>
-              <a:t>5</a:t>
-            </a:r>
-            <a:endParaRPr sz="1200" b="1" dirty="0">
-              <a:solidFill>
-                <a:srgbClr val="178C87"/>
-              </a:solidFill>
-              <a:latin typeface="Arial"/>
-              <a:ea typeface="Arial"/>
-              <a:cs typeface="Arial"/>
-            </a:endParaRPr>
+              <a:t>05</a:t>
+            </a:r>
           </a:p>
         </p:txBody>
       </p:sp>
@@ -17149,7 +15416,7 @@
           <p:cNvPr id="7" name="Imagen 6">
             <a:extLst>
               <a:ext uri="{FF2B5EF4-FFF2-40B4-BE49-F238E27FC236}">
-                <a16:creationId xmlns:a16="http://schemas.microsoft.com/office/drawing/2014/main" id="{340B7E76-F876-44DA-A1A7-28F998F854B8}"/>
+                <a16:creationId xmlns:a16="http://schemas.microsoft.com/office/drawing/2014/main" id="{F3CB9261-F579-4564-94AC-FA5335EA60B7}"/>
               </a:ext>
             </a:extLst>
           </p:cNvPr>
@@ -17175,7 +15442,7 @@
     </p:spTree>
     <p:extLst>
       <p:ext uri="{BB962C8B-B14F-4D97-AF65-F5344CB8AC3E}">
-        <p14:creationId xmlns:p14="http://schemas.microsoft.com/office/powerpoint/2010/main" val="1075283692"/>
+        <p14:creationId xmlns:p14="http://schemas.microsoft.com/office/powerpoint/2010/main" val="270798237"/>
       </p:ext>
     </p:extLst>
   </p:cSld>
@@ -17215,7 +15482,7 @@
           <p:cNvPr id="8" name="Rectángulo 7">
             <a:extLst>
               <a:ext uri="{FF2B5EF4-FFF2-40B4-BE49-F238E27FC236}">
-                <a16:creationId xmlns:a16="http://schemas.microsoft.com/office/drawing/2014/main" id="{98C3CCFB-44BA-413E-AAA3-8BA1BFA405B7}"/>
+                <a16:creationId xmlns:a16="http://schemas.microsoft.com/office/drawing/2014/main" id="{10FDBA66-C401-4832-BA85-AF5A8166E804}"/>
               </a:ext>
             </a:extLst>
           </p:cNvPr>
@@ -17246,7 +15513,7 @@
           <p:cNvPr id="2" name="Rectángulo 1">
             <a:extLst>
               <a:ext uri="{FF2B5EF4-FFF2-40B4-BE49-F238E27FC236}">
-                <a16:creationId xmlns:a16="http://schemas.microsoft.com/office/drawing/2014/main" id="{145C295A-522E-4F2D-95D9-02A230C098FF}"/>
+                <a16:creationId xmlns:a16="http://schemas.microsoft.com/office/drawing/2014/main" id="{F5E783CA-B144-4282-96C6-EE5E7C12DD26}"/>
               </a:ext>
             </a:extLst>
           </p:cNvPr>
@@ -17309,7 +15576,7 @@
                 <a:ea typeface="Arial"/>
                 <a:cs typeface="Arial"/>
               </a:rPr>
-              <a:t>A2 · CNN + BatchNorm</a:t>
+              <a:t>A3 · CNN + BatchNorm + Dropout</a:t>
             </a:r>
           </a:p>
         </p:txBody>
@@ -17319,7 +15586,7 @@
           <p:cNvPr id="3" name="Rectángulo 2">
             <a:extLst>
               <a:ext uri="{FF2B5EF4-FFF2-40B4-BE49-F238E27FC236}">
-                <a16:creationId xmlns:a16="http://schemas.microsoft.com/office/drawing/2014/main" id="{635A9FC6-3B79-49C2-9868-874C2E34BC9F}"/>
+                <a16:creationId xmlns:a16="http://schemas.microsoft.com/office/drawing/2014/main" id="{3126F180-04AC-4CA5-82E8-441AFB1BE923}"/>
               </a:ext>
             </a:extLst>
           </p:cNvPr>
@@ -17392,7 +15659,7 @@
           <p:cNvPr id="4" name="Rectángulo 3">
             <a:extLst>
               <a:ext uri="{FF2B5EF4-FFF2-40B4-BE49-F238E27FC236}">
-                <a16:creationId xmlns:a16="http://schemas.microsoft.com/office/drawing/2014/main" id="{90544E1A-E3D4-46DE-AF9F-0AD87926BBDD}"/>
+                <a16:creationId xmlns:a16="http://schemas.microsoft.com/office/drawing/2014/main" id="{D0BE9827-470D-41A6-AB50-EB4EBBD7F773}"/>
               </a:ext>
             </a:extLst>
           </p:cNvPr>
@@ -17423,7 +15690,7 @@
           <p:cNvPr id="5" name="Rectángulo 4">
             <a:extLst>
               <a:ext uri="{FF2B5EF4-FFF2-40B4-BE49-F238E27FC236}">
-                <a16:creationId xmlns:a16="http://schemas.microsoft.com/office/drawing/2014/main" id="{B96A0AD3-8933-4B27-855C-3F57904A36DC}"/>
+                <a16:creationId xmlns:a16="http://schemas.microsoft.com/office/drawing/2014/main" id="{8BFD2949-E56D-404B-9DE9-4B5252B0887E}"/>
               </a:ext>
             </a:extLst>
           </p:cNvPr>
@@ -17496,7 +15763,7 @@
           <p:cNvPr id="6" name="Rectángulo 5">
             <a:extLst>
               <a:ext uri="{FF2B5EF4-FFF2-40B4-BE49-F238E27FC236}">
-                <a16:creationId xmlns:a16="http://schemas.microsoft.com/office/drawing/2014/main" id="{CD857B0A-AE99-4D7C-9AEB-6158D60F497C}"/>
+                <a16:creationId xmlns:a16="http://schemas.microsoft.com/office/drawing/2014/main" id="{D0D22709-30BD-4CF2-B9F8-9643DC6EEB21}"/>
               </a:ext>
             </a:extLst>
           </p:cNvPr>
@@ -17551,7 +15818,7 @@
               </a:defRPr>
             </a:pPr>
             <a:r>
-              <a:rPr sz="1200" b="1" dirty="0">
+              <a:rPr lang="es-MX" sz="1200" b="1">
                 <a:solidFill>
                   <a:srgbClr val="178C87"/>
                 </a:solidFill>
@@ -17559,27 +15826,8 @@
                 <a:ea typeface="Arial"/>
                 <a:cs typeface="Arial"/>
               </a:rPr>
-              <a:t>0</a:t>
-            </a:r>
-            <a:r>
-              <a:rPr lang="es-MX" sz="1200" b="1" dirty="0">
-                <a:solidFill>
-                  <a:srgbClr val="178C87"/>
-                </a:solidFill>
-                <a:latin typeface="Arial"/>
-                <a:ea typeface="Arial"/>
-                <a:cs typeface="Arial"/>
-              </a:rPr>
-              <a:t>6</a:t>
-            </a:r>
-            <a:endParaRPr sz="1200" b="1" dirty="0">
-              <a:solidFill>
-                <a:srgbClr val="178C87"/>
-              </a:solidFill>
-              <a:latin typeface="Arial"/>
-              <a:ea typeface="Arial"/>
-              <a:cs typeface="Arial"/>
-            </a:endParaRPr>
+              <a:t>06</a:t>
+            </a:r>
           </a:p>
         </p:txBody>
       </p:sp>
@@ -17588,7 +15836,7 @@
           <p:cNvPr id="7" name="Imagen 6">
             <a:extLst>
               <a:ext uri="{FF2B5EF4-FFF2-40B4-BE49-F238E27FC236}">
-                <a16:creationId xmlns:a16="http://schemas.microsoft.com/office/drawing/2014/main" id="{F3CB9261-F579-4564-94AC-FA5335EA60B7}"/>
+                <a16:creationId xmlns:a16="http://schemas.microsoft.com/office/drawing/2014/main" id="{2C782675-0554-4B18-8ACD-FE29F23E2F7E}"/>
               </a:ext>
             </a:extLst>
           </p:cNvPr>
@@ -17614,7 +15862,7 @@
     </p:spTree>
     <p:extLst>
       <p:ext uri="{BB962C8B-B14F-4D97-AF65-F5344CB8AC3E}">
-        <p14:creationId xmlns:p14="http://schemas.microsoft.com/office/powerpoint/2010/main" val="270798237"/>
+        <p14:creationId xmlns:p14="http://schemas.microsoft.com/office/powerpoint/2010/main" val="58120870"/>
       </p:ext>
     </p:extLst>
   </p:cSld>
@@ -17654,7 +15902,7 @@
           <p:cNvPr id="8" name="Rectángulo 7">
             <a:extLst>
               <a:ext uri="{FF2B5EF4-FFF2-40B4-BE49-F238E27FC236}">
-                <a16:creationId xmlns:a16="http://schemas.microsoft.com/office/drawing/2014/main" id="{10FDBA66-C401-4832-BA85-AF5A8166E804}"/>
+                <a16:creationId xmlns:a16="http://schemas.microsoft.com/office/drawing/2014/main" id="{3FB0C67C-C1EA-4650-8D06-A2725D37F209}"/>
               </a:ext>
             </a:extLst>
           </p:cNvPr>
@@ -17685,7 +15933,7 @@
           <p:cNvPr id="2" name="Rectángulo 1">
             <a:extLst>
               <a:ext uri="{FF2B5EF4-FFF2-40B4-BE49-F238E27FC236}">
-                <a16:creationId xmlns:a16="http://schemas.microsoft.com/office/drawing/2014/main" id="{F5E783CA-B144-4282-96C6-EE5E7C12DD26}"/>
+                <a16:creationId xmlns:a16="http://schemas.microsoft.com/office/drawing/2014/main" id="{CDA88896-DD5D-44F4-B623-F6BE2F40F172}"/>
               </a:ext>
             </a:extLst>
           </p:cNvPr>
@@ -17748,7 +15996,7 @@
                 <a:ea typeface="Arial"/>
                 <a:cs typeface="Arial"/>
               </a:rPr>
-              <a:t>A3 · CNN + BatchNorm + Dropout</a:t>
+              <a:t>D1 · CNN + Dropout</a:t>
             </a:r>
           </a:p>
         </p:txBody>
@@ -17758,7 +16006,7 @@
           <p:cNvPr id="3" name="Rectángulo 2">
             <a:extLst>
               <a:ext uri="{FF2B5EF4-FFF2-40B4-BE49-F238E27FC236}">
-                <a16:creationId xmlns:a16="http://schemas.microsoft.com/office/drawing/2014/main" id="{3126F180-04AC-4CA5-82E8-441AFB1BE923}"/>
+                <a16:creationId xmlns:a16="http://schemas.microsoft.com/office/drawing/2014/main" id="{869FE626-95D0-4B64-BB14-425A179652BA}"/>
               </a:ext>
             </a:extLst>
           </p:cNvPr>
@@ -17831,7 +16079,7 @@
           <p:cNvPr id="4" name="Rectángulo 3">
             <a:extLst>
               <a:ext uri="{FF2B5EF4-FFF2-40B4-BE49-F238E27FC236}">
-                <a16:creationId xmlns:a16="http://schemas.microsoft.com/office/drawing/2014/main" id="{D0BE9827-470D-41A6-AB50-EB4EBBD7F773}"/>
+                <a16:creationId xmlns:a16="http://schemas.microsoft.com/office/drawing/2014/main" id="{37E7B1B4-92EB-4099-882C-347CC1D91E0D}"/>
               </a:ext>
             </a:extLst>
           </p:cNvPr>
@@ -17862,7 +16110,7 @@
           <p:cNvPr id="5" name="Rectángulo 4">
             <a:extLst>
               <a:ext uri="{FF2B5EF4-FFF2-40B4-BE49-F238E27FC236}">
-                <a16:creationId xmlns:a16="http://schemas.microsoft.com/office/drawing/2014/main" id="{8BFD2949-E56D-404B-9DE9-4B5252B0887E}"/>
+                <a16:creationId xmlns:a16="http://schemas.microsoft.com/office/drawing/2014/main" id="{D45DC9F0-9A10-4916-A685-D4211239782C}"/>
               </a:ext>
             </a:extLst>
           </p:cNvPr>
@@ -17935,7 +16183,7 @@
           <p:cNvPr id="6" name="Rectángulo 5">
             <a:extLst>
               <a:ext uri="{FF2B5EF4-FFF2-40B4-BE49-F238E27FC236}">
-                <a16:creationId xmlns:a16="http://schemas.microsoft.com/office/drawing/2014/main" id="{D0D22709-30BD-4CF2-B9F8-9643DC6EEB21}"/>
+                <a16:creationId xmlns:a16="http://schemas.microsoft.com/office/drawing/2014/main" id="{8CBD84A7-AC9D-4C2B-8853-BB5DDE30E5C3}"/>
               </a:ext>
             </a:extLst>
           </p:cNvPr>
@@ -17990,7 +16238,7 @@
               </a:defRPr>
             </a:pPr>
             <a:r>
-              <a:rPr sz="1200" b="1" dirty="0">
+              <a:rPr lang="es-MX" sz="1200" b="1">
                 <a:solidFill>
                   <a:srgbClr val="178C87"/>
                 </a:solidFill>
@@ -17998,27 +16246,8 @@
                 <a:ea typeface="Arial"/>
                 <a:cs typeface="Arial"/>
               </a:rPr>
-              <a:t>0</a:t>
-            </a:r>
-            <a:r>
-              <a:rPr lang="es-MX" sz="1200" b="1" dirty="0">
-                <a:solidFill>
-                  <a:srgbClr val="178C87"/>
-                </a:solidFill>
-                <a:latin typeface="Arial"/>
-                <a:ea typeface="Arial"/>
-                <a:cs typeface="Arial"/>
-              </a:rPr>
-              <a:t>7</a:t>
-            </a:r>
-            <a:endParaRPr sz="1200" b="1" dirty="0">
-              <a:solidFill>
-                <a:srgbClr val="178C87"/>
-              </a:solidFill>
-              <a:latin typeface="Arial"/>
-              <a:ea typeface="Arial"/>
-              <a:cs typeface="Arial"/>
-            </a:endParaRPr>
+              <a:t>07</a:t>
+            </a:r>
           </a:p>
         </p:txBody>
       </p:sp>
@@ -18027,7 +16256,7 @@
           <p:cNvPr id="7" name="Imagen 6">
             <a:extLst>
               <a:ext uri="{FF2B5EF4-FFF2-40B4-BE49-F238E27FC236}">
-                <a16:creationId xmlns:a16="http://schemas.microsoft.com/office/drawing/2014/main" id="{2C782675-0554-4B18-8ACD-FE29F23E2F7E}"/>
+                <a16:creationId xmlns:a16="http://schemas.microsoft.com/office/drawing/2014/main" id="{54FE338D-F57E-46BD-9230-FDC568FDCE9C}"/>
               </a:ext>
             </a:extLst>
           </p:cNvPr>
@@ -18053,7 +16282,7 @@
     </p:spTree>
     <p:extLst>
       <p:ext uri="{BB962C8B-B14F-4D97-AF65-F5344CB8AC3E}">
-        <p14:creationId xmlns:p14="http://schemas.microsoft.com/office/powerpoint/2010/main" val="58120870"/>
+        <p14:creationId xmlns:p14="http://schemas.microsoft.com/office/powerpoint/2010/main" val="1286194879"/>
       </p:ext>
     </p:extLst>
   </p:cSld>
@@ -18093,7 +16322,7 @@
           <p:cNvPr id="8" name="Rectángulo 7">
             <a:extLst>
               <a:ext uri="{FF2B5EF4-FFF2-40B4-BE49-F238E27FC236}">
-                <a16:creationId xmlns:a16="http://schemas.microsoft.com/office/drawing/2014/main" id="{3FB0C67C-C1EA-4650-8D06-A2725D37F209}"/>
+                <a16:creationId xmlns:a16="http://schemas.microsoft.com/office/drawing/2014/main" id="{CDA886DD-5227-421D-A7B4-B373BE87CBF9}"/>
               </a:ext>
             </a:extLst>
           </p:cNvPr>
@@ -18124,7 +16353,7 @@
           <p:cNvPr id="2" name="Rectángulo 1">
             <a:extLst>
               <a:ext uri="{FF2B5EF4-FFF2-40B4-BE49-F238E27FC236}">
-                <a16:creationId xmlns:a16="http://schemas.microsoft.com/office/drawing/2014/main" id="{CDA88896-DD5D-44F4-B623-F6BE2F40F172}"/>
+                <a16:creationId xmlns:a16="http://schemas.microsoft.com/office/drawing/2014/main" id="{10D1454E-D911-4C05-BA60-E4FC91E90AFA}"/>
               </a:ext>
             </a:extLst>
           </p:cNvPr>
@@ -18187,7 +16416,7 @@
                 <a:ea typeface="Arial"/>
                 <a:cs typeface="Arial"/>
               </a:rPr>
-              <a:t>D1 · CNN + Dropout</a:t>
+              <a:t>C1 · CNN base · tasa de aprendizaje 0.0003</a:t>
             </a:r>
           </a:p>
         </p:txBody>
@@ -18197,7 +16426,7 @@
           <p:cNvPr id="3" name="Rectángulo 2">
             <a:extLst>
               <a:ext uri="{FF2B5EF4-FFF2-40B4-BE49-F238E27FC236}">
-                <a16:creationId xmlns:a16="http://schemas.microsoft.com/office/drawing/2014/main" id="{869FE626-95D0-4B64-BB14-425A179652BA}"/>
+                <a16:creationId xmlns:a16="http://schemas.microsoft.com/office/drawing/2014/main" id="{63C7154F-5EB0-45F1-B668-6751E7BDD7EC}"/>
               </a:ext>
             </a:extLst>
           </p:cNvPr>
@@ -18270,7 +16499,7 @@
           <p:cNvPr id="4" name="Rectángulo 3">
             <a:extLst>
               <a:ext uri="{FF2B5EF4-FFF2-40B4-BE49-F238E27FC236}">
-                <a16:creationId xmlns:a16="http://schemas.microsoft.com/office/drawing/2014/main" id="{37E7B1B4-92EB-4099-882C-347CC1D91E0D}"/>
+                <a16:creationId xmlns:a16="http://schemas.microsoft.com/office/drawing/2014/main" id="{A8A1D9A3-40BF-4B80-B5AF-247887F4139F}"/>
               </a:ext>
             </a:extLst>
           </p:cNvPr>
@@ -18301,7 +16530,7 @@
           <p:cNvPr id="5" name="Rectángulo 4">
             <a:extLst>
               <a:ext uri="{FF2B5EF4-FFF2-40B4-BE49-F238E27FC236}">
-                <a16:creationId xmlns:a16="http://schemas.microsoft.com/office/drawing/2014/main" id="{D45DC9F0-9A10-4916-A685-D4211239782C}"/>
+                <a16:creationId xmlns:a16="http://schemas.microsoft.com/office/drawing/2014/main" id="{E8904F60-623A-4366-9A3A-3979D3188BC2}"/>
               </a:ext>
             </a:extLst>
           </p:cNvPr>
@@ -18374,7 +16603,7 @@
           <p:cNvPr id="6" name="Rectángulo 5">
             <a:extLst>
               <a:ext uri="{FF2B5EF4-FFF2-40B4-BE49-F238E27FC236}">
-                <a16:creationId xmlns:a16="http://schemas.microsoft.com/office/drawing/2014/main" id="{8CBD84A7-AC9D-4C2B-8853-BB5DDE30E5C3}"/>
+                <a16:creationId xmlns:a16="http://schemas.microsoft.com/office/drawing/2014/main" id="{ED8BCA2B-E01E-4489-9896-43E347036902}"/>
               </a:ext>
             </a:extLst>
           </p:cNvPr>
@@ -18429,7 +16658,7 @@
               </a:defRPr>
             </a:pPr>
             <a:r>
-              <a:rPr sz="1200" b="1" dirty="0">
+              <a:rPr lang="es-MX" sz="1200" b="1">
                 <a:solidFill>
                   <a:srgbClr val="178C87"/>
                 </a:solidFill>
@@ -18437,18 +16666,7 @@
                 <a:ea typeface="Arial"/>
                 <a:cs typeface="Arial"/>
               </a:rPr>
-              <a:t>0</a:t>
-            </a:r>
-            <a:r>
-              <a:rPr lang="es-MX" sz="1200" b="1" dirty="0">
-                <a:solidFill>
-                  <a:srgbClr val="178C87"/>
-                </a:solidFill>
-                <a:latin typeface="Arial"/>
-                <a:ea typeface="Arial"/>
-                <a:cs typeface="Arial"/>
-              </a:rPr>
-              <a:t>8</a:t>
+              <a:t>08</a:t>
             </a:r>
             <a:endParaRPr sz="1200" b="1" dirty="0">
               <a:solidFill>
@@ -18466,7 +16684,7 @@
           <p:cNvPr id="7" name="Imagen 6">
             <a:extLst>
               <a:ext uri="{FF2B5EF4-FFF2-40B4-BE49-F238E27FC236}">
-                <a16:creationId xmlns:a16="http://schemas.microsoft.com/office/drawing/2014/main" id="{54FE338D-F57E-46BD-9230-FDC568FDCE9C}"/>
+                <a16:creationId xmlns:a16="http://schemas.microsoft.com/office/drawing/2014/main" id="{FB7710D3-36E1-40DD-9479-A65D500758B8}"/>
               </a:ext>
             </a:extLst>
           </p:cNvPr>
@@ -18492,7 +16710,7 @@
     </p:spTree>
     <p:extLst>
       <p:ext uri="{BB962C8B-B14F-4D97-AF65-F5344CB8AC3E}">
-        <p14:creationId xmlns:p14="http://schemas.microsoft.com/office/powerpoint/2010/main" val="1286194879"/>
+        <p14:creationId xmlns:p14="http://schemas.microsoft.com/office/powerpoint/2010/main" val="470703015"/>
       </p:ext>
     </p:extLst>
   </p:cSld>
@@ -18529,10 +16747,10 @@
       </p:grpSpPr>
       <p:sp>
         <p:nvSpPr>
-          <p:cNvPr id="8" name="Rectángulo 7">
-            <a:extLst>
-              <a:ext uri="{FF2B5EF4-FFF2-40B4-BE49-F238E27FC236}">
-                <a16:creationId xmlns:a16="http://schemas.microsoft.com/office/drawing/2014/main" id="{CDA886DD-5227-421D-A7B4-B373BE87CBF9}"/>
+          <p:cNvPr id="35" name="Rectángulo 34">
+            <a:extLst>
+              <a:ext uri="{FF2B5EF4-FFF2-40B4-BE49-F238E27FC236}">
+                <a16:creationId xmlns:a16="http://schemas.microsoft.com/office/drawing/2014/main" id="{D2BF22AD-35B4-4633-BA0B-9670B3BD16BE}"/>
               </a:ext>
             </a:extLst>
           </p:cNvPr>
@@ -18563,7 +16781,7 @@
           <p:cNvPr id="2" name="Rectángulo 1">
             <a:extLst>
               <a:ext uri="{FF2B5EF4-FFF2-40B4-BE49-F238E27FC236}">
-                <a16:creationId xmlns:a16="http://schemas.microsoft.com/office/drawing/2014/main" id="{10D1454E-D911-4C05-BA60-E4FC91E90AFA}"/>
+                <a16:creationId xmlns:a16="http://schemas.microsoft.com/office/drawing/2014/main" id="{5A0D6943-A786-4A83-997A-14A72DB01FB4}"/>
               </a:ext>
             </a:extLst>
           </p:cNvPr>
@@ -18592,7 +16810,7 @@
           </a:bodyPr>
           <a:lstStyle>
             <a:defPPr algn="l">
-              <a:defRPr sz="3000" b="1">
+              <a:defRPr sz="3150" b="1">
                 <a:solidFill>
                   <a:srgbClr val="102A36"/>
                 </a:solidFill>
@@ -18608,7 +16826,7 @@
                 <a:spcPct val="105000"/>
               </a:lnSpc>
               <a:buNone/>
-              <a:defRPr sz="3000" b="1">
+              <a:defRPr sz="3150" b="1">
                 <a:solidFill>
                   <a:srgbClr val="102A36"/>
                 </a:solidFill>
@@ -18618,7 +16836,7 @@
               </a:defRPr>
             </a:pPr>
             <a:r>
-              <a:rPr sz="3000" b="1">
+              <a:rPr sz="3150" b="1">
                 <a:solidFill>
                   <a:srgbClr val="102A36"/>
                 </a:solidFill>
@@ -18626,7 +16844,7 @@
                 <a:ea typeface="Arial"/>
                 <a:cs typeface="Arial"/>
               </a:rPr>
-              <a:t>C1 · CNN base · tasa de aprendizaje 0.0003</a:t>
+              <a:t>Validación: A2 y A3 lideran</a:t>
             </a:r>
           </a:p>
         </p:txBody>
@@ -18636,7 +16854,7 @@
           <p:cNvPr id="3" name="Rectángulo 2">
             <a:extLst>
               <a:ext uri="{FF2B5EF4-FFF2-40B4-BE49-F238E27FC236}">
-                <a16:creationId xmlns:a16="http://schemas.microsoft.com/office/drawing/2014/main" id="{63C7154F-5EB0-45F1-B668-6751E7BDD7EC}"/>
+                <a16:creationId xmlns:a16="http://schemas.microsoft.com/office/drawing/2014/main" id="{50EE96CF-7E54-4B28-805E-6B39D1FE3869}"/>
               </a:ext>
             </a:extLst>
           </p:cNvPr>
@@ -18648,7 +16866,7 @@
         <p:spPr>
           <a:xfrm>
             <a:off x="628650" y="1038225"/>
-            <a:ext cx="10477500" cy="323850"/>
+            <a:ext cx="10477500" cy="342900"/>
           </a:xfrm>
           <a:prstGeom prst="rect">
             <a:avLst/>
@@ -18665,7 +16883,7 @@
           </a:bodyPr>
           <a:lstStyle>
             <a:defPPr algn="l">
-              <a:defRPr sz="1350" b="0">
+              <a:defRPr sz="1500" b="0">
                 <a:solidFill>
                   <a:srgbClr val="536C73"/>
                 </a:solidFill>
@@ -18681,7 +16899,7 @@
                 <a:spcPct val="105000"/>
               </a:lnSpc>
               <a:buNone/>
-              <a:defRPr sz="1350" b="0">
+              <a:defRPr sz="1500" b="0">
                 <a:solidFill>
                   <a:srgbClr val="536C73"/>
                 </a:solidFill>
@@ -18691,7 +16909,7 @@
               </a:defRPr>
             </a:pPr>
             <a:r>
-              <a:rPr sz="1350" b="0">
+              <a:rPr sz="1500" b="0">
                 <a:solidFill>
                   <a:srgbClr val="536C73"/>
                 </a:solidFill>
@@ -18699,7 +16917,7 @@
                 <a:ea typeface="Arial"/>
                 <a:cs typeface="Arial"/>
               </a:rPr>
-              <a:t>Evolución de train y validation · 40 épocas</a:t>
+              <a:t>Macro-F1 (%) en el checkpoint seleccionado por menor pérdida de validación</a:t>
             </a:r>
           </a:p>
         </p:txBody>
@@ -18709,7 +16927,7 @@
           <p:cNvPr id="4" name="Rectángulo 3">
             <a:extLst>
               <a:ext uri="{FF2B5EF4-FFF2-40B4-BE49-F238E27FC236}">
-                <a16:creationId xmlns:a16="http://schemas.microsoft.com/office/drawing/2014/main" id="{A8A1D9A3-40BF-4B80-B5AF-247887F4139F}"/>
+                <a16:creationId xmlns:a16="http://schemas.microsoft.com/office/drawing/2014/main" id="{EBEE9313-C286-46A8-B0B2-E4D8F7A925ED}"/>
               </a:ext>
             </a:extLst>
           </p:cNvPr>
@@ -18740,7 +16958,7 @@
           <p:cNvPr id="5" name="Rectángulo 4">
             <a:extLst>
               <a:ext uri="{FF2B5EF4-FFF2-40B4-BE49-F238E27FC236}">
-                <a16:creationId xmlns:a16="http://schemas.microsoft.com/office/drawing/2014/main" id="{E8904F60-623A-4366-9A3A-3979D3188BC2}"/>
+                <a16:creationId xmlns:a16="http://schemas.microsoft.com/office/drawing/2014/main" id="{F748BEBB-FDE1-489B-A61D-66F4C9CA5993}"/>
               </a:ext>
             </a:extLst>
           </p:cNvPr>
@@ -18813,7 +17031,7 @@
           <p:cNvPr id="6" name="Rectángulo 5">
             <a:extLst>
               <a:ext uri="{FF2B5EF4-FFF2-40B4-BE49-F238E27FC236}">
-                <a16:creationId xmlns:a16="http://schemas.microsoft.com/office/drawing/2014/main" id="{ED8BCA2B-E01E-4489-9896-43E347036902}"/>
+                <a16:creationId xmlns:a16="http://schemas.microsoft.com/office/drawing/2014/main" id="{A4A1AEBB-E833-4126-B85E-EF28212CA3F9}"/>
               </a:ext>
             </a:extLst>
           </p:cNvPr>
@@ -18868,7 +17086,7 @@
               </a:defRPr>
             </a:pPr>
             <a:r>
-              <a:rPr lang="es-MX" sz="1200" b="1" dirty="0">
+              <a:rPr lang="es-ES" sz="1200" b="1">
                 <a:solidFill>
                   <a:srgbClr val="178C87"/>
                 </a:solidFill>
@@ -18878,7 +17096,7 @@
               </a:rPr>
               <a:t>09</a:t>
             </a:r>
-            <a:endParaRPr sz="1200" b="1" dirty="0">
+            <a:endParaRPr sz="1200" b="1">
               <a:solidFill>
                 <a:srgbClr val="178C87"/>
               </a:solidFill>
@@ -18889,38 +17107,1760 @@
           </a:p>
         </p:txBody>
       </p:sp>
-      <p:pic>
-        <p:nvPicPr>
-          <p:cNvPr id="7" name="Imagen 6">
-            <a:extLst>
-              <a:ext uri="{FF2B5EF4-FFF2-40B4-BE49-F238E27FC236}">
-                <a16:creationId xmlns:a16="http://schemas.microsoft.com/office/drawing/2014/main" id="{FB7710D3-36E1-40DD-9479-A65D500758B8}"/>
-              </a:ext>
-            </a:extLst>
-          </p:cNvPr>
-          <p:cNvPicPr>
-            <a:picLocks noChangeAspect="1"/>
-          </p:cNvPicPr>
-          <p:nvPr/>
-        </p:nvPicPr>
-        <p:blipFill>
-          <a:blip r:embed="rId3"/>
-          <a:stretch/>
-        </p:blipFill>
-        <p:spPr>
-          <a:xfrm>
-            <a:off x="723900" y="1651289"/>
-            <a:ext cx="10668000" cy="3879273"/>
-          </a:xfrm>
-          <a:prstGeom prst="rect">
-            <a:avLst/>
-          </a:prstGeom>
-        </p:spPr>
-      </p:pic>
+      <p:sp>
+        <p:nvSpPr>
+          <p:cNvPr id="7" name="Rectángulo 6">
+            <a:extLst>
+              <a:ext uri="{FF2B5EF4-FFF2-40B4-BE49-F238E27FC236}">
+                <a16:creationId xmlns:a16="http://schemas.microsoft.com/office/drawing/2014/main" id="{F867F495-C730-491C-B6B7-7E845A8D8C9A}"/>
+              </a:ext>
+            </a:extLst>
+          </p:cNvPr>
+          <p:cNvSpPr>
+            <a:spLocks noGrp="1"/>
+          </p:cNvSpPr>
+          <p:nvPr/>
+        </p:nvSpPr>
+        <p:spPr>
+          <a:xfrm>
+            <a:off x="781050" y="1781175"/>
+            <a:ext cx="3429000" cy="247650"/>
+          </a:xfrm>
+          <a:prstGeom prst="rect">
+            <a:avLst/>
+          </a:prstGeom>
+          <a:noFill/>
+          <a:ln w="0">
+            <a:noFill/>
+            <a:prstDash val="solid"/>
+          </a:ln>
+        </p:spPr>
+        <p:txBody>
+          <a:bodyPr wrap="square" lIns="0" tIns="0" rIns="0" bIns="0" anchor="t">
+            <a:normAutofit/>
+          </a:bodyPr>
+          <a:lstStyle>
+            <a:defPPr algn="l">
+              <a:defRPr sz="1200" b="1">
+                <a:solidFill>
+                  <a:srgbClr val="536C73"/>
+                </a:solidFill>
+                <a:latin typeface="Arial"/>
+                <a:ea typeface="Arial"/>
+                <a:cs typeface="Arial"/>
+              </a:defRPr>
+            </a:defPPr>
+          </a:lstStyle>
+          <a:p>
+            <a:pPr algn="l">
+              <a:lnSpc>
+                <a:spcPct val="105000"/>
+              </a:lnSpc>
+              <a:buNone/>
+              <a:defRPr sz="1200" b="1">
+                <a:solidFill>
+                  <a:srgbClr val="536C73"/>
+                </a:solidFill>
+                <a:latin typeface="Arial"/>
+                <a:ea typeface="Arial"/>
+                <a:cs typeface="Arial"/>
+              </a:defRPr>
+            </a:pPr>
+            <a:r>
+              <a:rPr sz="1200" b="1">
+                <a:solidFill>
+                  <a:srgbClr val="536C73"/>
+                </a:solidFill>
+                <a:latin typeface="Arial"/>
+                <a:ea typeface="Arial"/>
+                <a:cs typeface="Arial"/>
+              </a:rPr>
+              <a:t>ESCENARIO</a:t>
+            </a:r>
+          </a:p>
+        </p:txBody>
+      </p:sp>
+      <p:sp>
+        <p:nvSpPr>
+          <p:cNvPr id="8" name="Rectángulo 7">
+            <a:extLst>
+              <a:ext uri="{FF2B5EF4-FFF2-40B4-BE49-F238E27FC236}">
+                <a16:creationId xmlns:a16="http://schemas.microsoft.com/office/drawing/2014/main" id="{21D4DB52-E8B4-44A7-B6EA-E0F31B05E79C}"/>
+              </a:ext>
+            </a:extLst>
+          </p:cNvPr>
+          <p:cNvSpPr>
+            <a:spLocks noGrp="1"/>
+          </p:cNvSpPr>
+          <p:nvPr/>
+        </p:nvSpPr>
+        <p:spPr>
+          <a:xfrm>
+            <a:off x="5524500" y="1781175"/>
+            <a:ext cx="1428750" cy="247650"/>
+          </a:xfrm>
+          <a:prstGeom prst="rect">
+            <a:avLst/>
+          </a:prstGeom>
+          <a:noFill/>
+          <a:ln w="0">
+            <a:noFill/>
+            <a:prstDash val="solid"/>
+          </a:ln>
+        </p:spPr>
+        <p:txBody>
+          <a:bodyPr wrap="square" lIns="0" tIns="0" rIns="0" bIns="0" anchor="t">
+            <a:normAutofit/>
+          </a:bodyPr>
+          <a:lstStyle>
+            <a:defPPr algn="r">
+              <a:defRPr sz="1200" b="1">
+                <a:solidFill>
+                  <a:srgbClr val="536C73"/>
+                </a:solidFill>
+                <a:latin typeface="Arial"/>
+                <a:ea typeface="Arial"/>
+                <a:cs typeface="Arial"/>
+              </a:defRPr>
+            </a:defPPr>
+          </a:lstStyle>
+          <a:p>
+            <a:pPr algn="r">
+              <a:lnSpc>
+                <a:spcPct val="105000"/>
+              </a:lnSpc>
+              <a:buNone/>
+              <a:defRPr sz="1200" b="1">
+                <a:solidFill>
+                  <a:srgbClr val="536C73"/>
+                </a:solidFill>
+                <a:latin typeface="Arial"/>
+                <a:ea typeface="Arial"/>
+                <a:cs typeface="Arial"/>
+              </a:defRPr>
+            </a:pPr>
+            <a:r>
+              <a:rPr sz="1200" b="1">
+                <a:solidFill>
+                  <a:srgbClr val="536C73"/>
+                </a:solidFill>
+                <a:latin typeface="Arial"/>
+                <a:ea typeface="Arial"/>
+                <a:cs typeface="Arial"/>
+              </a:rPr>
+              <a:t>MACRO-F1</a:t>
+            </a:r>
+          </a:p>
+        </p:txBody>
+      </p:sp>
+      <p:sp>
+        <p:nvSpPr>
+          <p:cNvPr id="9" name="Rectángulo 8">
+            <a:extLst>
+              <a:ext uri="{FF2B5EF4-FFF2-40B4-BE49-F238E27FC236}">
+                <a16:creationId xmlns:a16="http://schemas.microsoft.com/office/drawing/2014/main" id="{C3ACC8C6-D31E-4CA5-A54F-BC06C0438D8E}"/>
+              </a:ext>
+            </a:extLst>
+          </p:cNvPr>
+          <p:cNvSpPr>
+            <a:spLocks noGrp="1"/>
+          </p:cNvSpPr>
+          <p:nvPr/>
+        </p:nvSpPr>
+        <p:spPr>
+          <a:xfrm>
+            <a:off x="742950" y="2105025"/>
+            <a:ext cx="6381750" cy="9525"/>
+          </a:xfrm>
+          <a:prstGeom prst="rect">
+            <a:avLst/>
+          </a:prstGeom>
+          <a:solidFill>
+            <a:srgbClr val="C8D7D5"/>
+          </a:solidFill>
+          <a:ln w="0">
+            <a:noFill/>
+            <a:prstDash val="solid"/>
+          </a:ln>
+        </p:spPr>
+      </p:sp>
+      <p:sp>
+        <p:nvSpPr>
+          <p:cNvPr id="10" name="Rectángulo 9">
+            <a:extLst>
+              <a:ext uri="{FF2B5EF4-FFF2-40B4-BE49-F238E27FC236}">
+                <a16:creationId xmlns:a16="http://schemas.microsoft.com/office/drawing/2014/main" id="{968FF3AE-C636-47AB-9D53-AB0A50A60F2F}"/>
+              </a:ext>
+            </a:extLst>
+          </p:cNvPr>
+          <p:cNvSpPr>
+            <a:spLocks noGrp="1"/>
+          </p:cNvSpPr>
+          <p:nvPr/>
+        </p:nvSpPr>
+        <p:spPr>
+          <a:xfrm>
+            <a:off x="800100" y="2286000"/>
+            <a:ext cx="666750" cy="333375"/>
+          </a:xfrm>
+          <a:prstGeom prst="rect">
+            <a:avLst/>
+          </a:prstGeom>
+          <a:noFill/>
+          <a:ln w="0">
+            <a:noFill/>
+            <a:prstDash val="solid"/>
+          </a:ln>
+        </p:spPr>
+        <p:txBody>
+          <a:bodyPr wrap="square" lIns="0" tIns="0" rIns="0" bIns="0" anchor="t">
+            <a:normAutofit/>
+          </a:bodyPr>
+          <a:lstStyle>
+            <a:defPPr algn="l">
+              <a:defRPr sz="1650" b="1">
+                <a:solidFill>
+                  <a:srgbClr val="178C87"/>
+                </a:solidFill>
+                <a:latin typeface="Arial"/>
+                <a:ea typeface="Arial"/>
+                <a:cs typeface="Arial"/>
+              </a:defRPr>
+            </a:defPPr>
+          </a:lstStyle>
+          <a:p>
+            <a:pPr algn="l">
+              <a:lnSpc>
+                <a:spcPct val="105000"/>
+              </a:lnSpc>
+              <a:buNone/>
+              <a:defRPr sz="1650" b="1">
+                <a:solidFill>
+                  <a:srgbClr val="178C87"/>
+                </a:solidFill>
+                <a:latin typeface="Arial"/>
+                <a:ea typeface="Arial"/>
+                <a:cs typeface="Arial"/>
+              </a:defRPr>
+            </a:pPr>
+            <a:r>
+              <a:rPr sz="1650" b="1">
+                <a:solidFill>
+                  <a:srgbClr val="178C87"/>
+                </a:solidFill>
+                <a:latin typeface="Arial"/>
+                <a:ea typeface="Arial"/>
+                <a:cs typeface="Arial"/>
+              </a:rPr>
+              <a:t>A1</a:t>
+            </a:r>
+          </a:p>
+        </p:txBody>
+      </p:sp>
+      <p:sp>
+        <p:nvSpPr>
+          <p:cNvPr id="11" name="Rectángulo 10">
+            <a:extLst>
+              <a:ext uri="{FF2B5EF4-FFF2-40B4-BE49-F238E27FC236}">
+                <a16:creationId xmlns:a16="http://schemas.microsoft.com/office/drawing/2014/main" id="{307E51C5-09F2-4964-A84A-EADDC37FA8E3}"/>
+              </a:ext>
+            </a:extLst>
+          </p:cNvPr>
+          <p:cNvSpPr>
+            <a:spLocks noGrp="1"/>
+          </p:cNvSpPr>
+          <p:nvPr/>
+        </p:nvSpPr>
+        <p:spPr>
+          <a:xfrm>
+            <a:off x="1619250" y="2286000"/>
+            <a:ext cx="3714750" cy="342900"/>
+          </a:xfrm>
+          <a:prstGeom prst="rect">
+            <a:avLst/>
+          </a:prstGeom>
+          <a:noFill/>
+          <a:ln w="0">
+            <a:noFill/>
+            <a:prstDash val="solid"/>
+          </a:ln>
+        </p:spPr>
+        <p:txBody>
+          <a:bodyPr wrap="square" lIns="0" tIns="0" rIns="0" bIns="0" anchor="t">
+            <a:normAutofit/>
+          </a:bodyPr>
+          <a:lstStyle>
+            <a:defPPr algn="l">
+              <a:defRPr sz="1575" b="0">
+                <a:solidFill>
+                  <a:srgbClr val="18323B"/>
+                </a:solidFill>
+                <a:latin typeface="Arial"/>
+                <a:ea typeface="Arial"/>
+                <a:cs typeface="Arial"/>
+              </a:defRPr>
+            </a:defPPr>
+          </a:lstStyle>
+          <a:p>
+            <a:pPr algn="l">
+              <a:lnSpc>
+                <a:spcPct val="105000"/>
+              </a:lnSpc>
+              <a:buNone/>
+              <a:defRPr sz="1575" b="0">
+                <a:solidFill>
+                  <a:srgbClr val="18323B"/>
+                </a:solidFill>
+                <a:latin typeface="Arial"/>
+                <a:ea typeface="Arial"/>
+                <a:cs typeface="Arial"/>
+              </a:defRPr>
+            </a:pPr>
+            <a:r>
+              <a:rPr sz="1575" b="0">
+                <a:solidFill>
+                  <a:srgbClr val="18323B"/>
+                </a:solidFill>
+                <a:latin typeface="Arial"/>
+                <a:ea typeface="Arial"/>
+                <a:cs typeface="Arial"/>
+              </a:rPr>
+              <a:t>CNN base</a:t>
+            </a:r>
+          </a:p>
+        </p:txBody>
+      </p:sp>
+      <p:sp>
+        <p:nvSpPr>
+          <p:cNvPr id="12" name="Rectángulo 11">
+            <a:extLst>
+              <a:ext uri="{FF2B5EF4-FFF2-40B4-BE49-F238E27FC236}">
+                <a16:creationId xmlns:a16="http://schemas.microsoft.com/office/drawing/2014/main" id="{96934CEE-3AE5-4061-996B-0E75D0567143}"/>
+              </a:ext>
+            </a:extLst>
+          </p:cNvPr>
+          <p:cNvSpPr>
+            <a:spLocks noGrp="1"/>
+          </p:cNvSpPr>
+          <p:nvPr/>
+        </p:nvSpPr>
+        <p:spPr>
+          <a:xfrm>
+            <a:off x="5524500" y="2286000"/>
+            <a:ext cx="1428750" cy="342900"/>
+          </a:xfrm>
+          <a:prstGeom prst="rect">
+            <a:avLst/>
+          </a:prstGeom>
+          <a:noFill/>
+          <a:ln w="0">
+            <a:noFill/>
+            <a:prstDash val="solid"/>
+          </a:ln>
+        </p:spPr>
+        <p:txBody>
+          <a:bodyPr wrap="square" lIns="0" tIns="0" rIns="0" bIns="0" anchor="t">
+            <a:normAutofit/>
+          </a:bodyPr>
+          <a:lstStyle>
+            <a:defPPr algn="r">
+              <a:defRPr sz="1650" b="1">
+                <a:solidFill>
+                  <a:srgbClr val="18323B"/>
+                </a:solidFill>
+                <a:latin typeface="Arial"/>
+                <a:ea typeface="Arial"/>
+                <a:cs typeface="Arial"/>
+              </a:defRPr>
+            </a:defPPr>
+          </a:lstStyle>
+          <a:p>
+            <a:pPr algn="r">
+              <a:lnSpc>
+                <a:spcPct val="105000"/>
+              </a:lnSpc>
+              <a:buNone/>
+              <a:defRPr sz="1650" b="1">
+                <a:solidFill>
+                  <a:srgbClr val="18323B"/>
+                </a:solidFill>
+                <a:latin typeface="Arial"/>
+                <a:ea typeface="Arial"/>
+                <a:cs typeface="Arial"/>
+              </a:defRPr>
+            </a:pPr>
+            <a:r>
+              <a:rPr sz="1650" b="1">
+                <a:solidFill>
+                  <a:srgbClr val="18323B"/>
+                </a:solidFill>
+                <a:latin typeface="Arial"/>
+                <a:ea typeface="Arial"/>
+                <a:cs typeface="Arial"/>
+              </a:rPr>
+              <a:t>88.72%</a:t>
+            </a:r>
+          </a:p>
+        </p:txBody>
+      </p:sp>
+      <p:sp>
+        <p:nvSpPr>
+          <p:cNvPr id="13" name="Rectángulo 12">
+            <a:extLst>
+              <a:ext uri="{FF2B5EF4-FFF2-40B4-BE49-F238E27FC236}">
+                <a16:creationId xmlns:a16="http://schemas.microsoft.com/office/drawing/2014/main" id="{62774BBC-2E5A-4293-85AB-0BF7CACE0E92}"/>
+              </a:ext>
+            </a:extLst>
+          </p:cNvPr>
+          <p:cNvSpPr>
+            <a:spLocks noGrp="1"/>
+          </p:cNvSpPr>
+          <p:nvPr/>
+        </p:nvSpPr>
+        <p:spPr>
+          <a:xfrm>
+            <a:off x="742950" y="2724150"/>
+            <a:ext cx="6381750" cy="9525"/>
+          </a:xfrm>
+          <a:prstGeom prst="rect">
+            <a:avLst/>
+          </a:prstGeom>
+          <a:solidFill>
+            <a:srgbClr val="C8D7D5"/>
+          </a:solidFill>
+          <a:ln w="0">
+            <a:noFill/>
+            <a:prstDash val="solid"/>
+          </a:ln>
+        </p:spPr>
+      </p:sp>
+      <p:sp>
+        <p:nvSpPr>
+          <p:cNvPr id="14" name="Rectángulo 13">
+            <a:extLst>
+              <a:ext uri="{FF2B5EF4-FFF2-40B4-BE49-F238E27FC236}">
+                <a16:creationId xmlns:a16="http://schemas.microsoft.com/office/drawing/2014/main" id="{7FB3AAE0-F771-461A-8ACD-CBE1B59D19AC}"/>
+              </a:ext>
+            </a:extLst>
+          </p:cNvPr>
+          <p:cNvSpPr>
+            <a:spLocks noGrp="1"/>
+          </p:cNvSpPr>
+          <p:nvPr/>
+        </p:nvSpPr>
+        <p:spPr>
+          <a:xfrm>
+            <a:off x="800100" y="2914650"/>
+            <a:ext cx="666750" cy="333375"/>
+          </a:xfrm>
+          <a:prstGeom prst="rect">
+            <a:avLst/>
+          </a:prstGeom>
+          <a:noFill/>
+          <a:ln w="0">
+            <a:noFill/>
+            <a:prstDash val="solid"/>
+          </a:ln>
+        </p:spPr>
+        <p:txBody>
+          <a:bodyPr wrap="square" lIns="0" tIns="0" rIns="0" bIns="0" anchor="t">
+            <a:normAutofit/>
+          </a:bodyPr>
+          <a:lstStyle>
+            <a:defPPr algn="l">
+              <a:defRPr sz="1650" b="1">
+                <a:solidFill>
+                  <a:srgbClr val="178C87"/>
+                </a:solidFill>
+                <a:latin typeface="Arial"/>
+                <a:ea typeface="Arial"/>
+                <a:cs typeface="Arial"/>
+              </a:defRPr>
+            </a:defPPr>
+          </a:lstStyle>
+          <a:p>
+            <a:pPr algn="l">
+              <a:lnSpc>
+                <a:spcPct val="105000"/>
+              </a:lnSpc>
+              <a:buNone/>
+              <a:defRPr sz="1650" b="1">
+                <a:solidFill>
+                  <a:srgbClr val="178C87"/>
+                </a:solidFill>
+                <a:latin typeface="Arial"/>
+                <a:ea typeface="Arial"/>
+                <a:cs typeface="Arial"/>
+              </a:defRPr>
+            </a:pPr>
+            <a:r>
+              <a:rPr sz="1650" b="1">
+                <a:solidFill>
+                  <a:srgbClr val="178C87"/>
+                </a:solidFill>
+                <a:latin typeface="Arial"/>
+                <a:ea typeface="Arial"/>
+                <a:cs typeface="Arial"/>
+              </a:rPr>
+              <a:t>A2</a:t>
+            </a:r>
+          </a:p>
+        </p:txBody>
+      </p:sp>
+      <p:sp>
+        <p:nvSpPr>
+          <p:cNvPr id="15" name="Rectángulo 14">
+            <a:extLst>
+              <a:ext uri="{FF2B5EF4-FFF2-40B4-BE49-F238E27FC236}">
+                <a16:creationId xmlns:a16="http://schemas.microsoft.com/office/drawing/2014/main" id="{9146BDDB-4BD4-47F8-A1F7-FC1334EA73E2}"/>
+              </a:ext>
+            </a:extLst>
+          </p:cNvPr>
+          <p:cNvSpPr>
+            <a:spLocks noGrp="1"/>
+          </p:cNvSpPr>
+          <p:nvPr/>
+        </p:nvSpPr>
+        <p:spPr>
+          <a:xfrm>
+            <a:off x="1619250" y="2914650"/>
+            <a:ext cx="3714750" cy="342900"/>
+          </a:xfrm>
+          <a:prstGeom prst="rect">
+            <a:avLst/>
+          </a:prstGeom>
+          <a:noFill/>
+          <a:ln w="0">
+            <a:noFill/>
+            <a:prstDash val="solid"/>
+          </a:ln>
+        </p:spPr>
+        <p:txBody>
+          <a:bodyPr wrap="square" lIns="0" tIns="0" rIns="0" bIns="0" anchor="t">
+            <a:normAutofit/>
+          </a:bodyPr>
+          <a:lstStyle>
+            <a:defPPr algn="l">
+              <a:defRPr sz="1575" b="0">
+                <a:solidFill>
+                  <a:srgbClr val="18323B"/>
+                </a:solidFill>
+                <a:latin typeface="Arial"/>
+                <a:ea typeface="Arial"/>
+                <a:cs typeface="Arial"/>
+              </a:defRPr>
+            </a:defPPr>
+          </a:lstStyle>
+          <a:p>
+            <a:pPr algn="l">
+              <a:lnSpc>
+                <a:spcPct val="105000"/>
+              </a:lnSpc>
+              <a:buNone/>
+              <a:defRPr sz="1575" b="0">
+                <a:solidFill>
+                  <a:srgbClr val="18323B"/>
+                </a:solidFill>
+                <a:latin typeface="Arial"/>
+                <a:ea typeface="Arial"/>
+                <a:cs typeface="Arial"/>
+              </a:defRPr>
+            </a:pPr>
+            <a:r>
+              <a:rPr sz="1575" b="0">
+                <a:solidFill>
+                  <a:srgbClr val="18323B"/>
+                </a:solidFill>
+                <a:latin typeface="Arial"/>
+                <a:ea typeface="Arial"/>
+                <a:cs typeface="Arial"/>
+              </a:rPr>
+              <a:t>CNN + BatchNorm</a:t>
+            </a:r>
+          </a:p>
+        </p:txBody>
+      </p:sp>
+      <p:sp>
+        <p:nvSpPr>
+          <p:cNvPr id="16" name="Rectángulo 15">
+            <a:extLst>
+              <a:ext uri="{FF2B5EF4-FFF2-40B4-BE49-F238E27FC236}">
+                <a16:creationId xmlns:a16="http://schemas.microsoft.com/office/drawing/2014/main" id="{18627089-14B0-44AB-878C-382937174F6B}"/>
+              </a:ext>
+            </a:extLst>
+          </p:cNvPr>
+          <p:cNvSpPr>
+            <a:spLocks noGrp="1"/>
+          </p:cNvSpPr>
+          <p:nvPr/>
+        </p:nvSpPr>
+        <p:spPr>
+          <a:xfrm>
+            <a:off x="5524500" y="2914650"/>
+            <a:ext cx="1428750" cy="342900"/>
+          </a:xfrm>
+          <a:prstGeom prst="rect">
+            <a:avLst/>
+          </a:prstGeom>
+          <a:noFill/>
+          <a:ln w="0">
+            <a:noFill/>
+            <a:prstDash val="solid"/>
+          </a:ln>
+        </p:spPr>
+        <p:txBody>
+          <a:bodyPr wrap="square" lIns="0" tIns="0" rIns="0" bIns="0" anchor="t">
+            <a:normAutofit/>
+          </a:bodyPr>
+          <a:lstStyle>
+            <a:defPPr algn="r">
+              <a:defRPr sz="1650" b="1">
+                <a:solidFill>
+                  <a:srgbClr val="18323B"/>
+                </a:solidFill>
+                <a:latin typeface="Arial"/>
+                <a:ea typeface="Arial"/>
+                <a:cs typeface="Arial"/>
+              </a:defRPr>
+            </a:defPPr>
+          </a:lstStyle>
+          <a:p>
+            <a:pPr algn="r">
+              <a:lnSpc>
+                <a:spcPct val="105000"/>
+              </a:lnSpc>
+              <a:buNone/>
+              <a:defRPr sz="1650" b="1">
+                <a:solidFill>
+                  <a:srgbClr val="18323B"/>
+                </a:solidFill>
+                <a:latin typeface="Arial"/>
+                <a:ea typeface="Arial"/>
+                <a:cs typeface="Arial"/>
+              </a:defRPr>
+            </a:pPr>
+            <a:r>
+              <a:rPr sz="1650" b="1">
+                <a:solidFill>
+                  <a:srgbClr val="18323B"/>
+                </a:solidFill>
+                <a:latin typeface="Arial"/>
+                <a:ea typeface="Arial"/>
+                <a:cs typeface="Arial"/>
+              </a:rPr>
+              <a:t>94.66%</a:t>
+            </a:r>
+          </a:p>
+        </p:txBody>
+      </p:sp>
+      <p:sp>
+        <p:nvSpPr>
+          <p:cNvPr id="17" name="Rectángulo 16">
+            <a:extLst>
+              <a:ext uri="{FF2B5EF4-FFF2-40B4-BE49-F238E27FC236}">
+                <a16:creationId xmlns:a16="http://schemas.microsoft.com/office/drawing/2014/main" id="{37DF8EDD-3C96-4ACF-9707-C22508D3AAA6}"/>
+              </a:ext>
+            </a:extLst>
+          </p:cNvPr>
+          <p:cNvSpPr>
+            <a:spLocks noGrp="1"/>
+          </p:cNvSpPr>
+          <p:nvPr/>
+        </p:nvSpPr>
+        <p:spPr>
+          <a:xfrm>
+            <a:off x="742950" y="3352800"/>
+            <a:ext cx="6381750" cy="9525"/>
+          </a:xfrm>
+          <a:prstGeom prst="rect">
+            <a:avLst/>
+          </a:prstGeom>
+          <a:solidFill>
+            <a:srgbClr val="C8D7D5"/>
+          </a:solidFill>
+          <a:ln w="0">
+            <a:noFill/>
+            <a:prstDash val="solid"/>
+          </a:ln>
+        </p:spPr>
+      </p:sp>
+      <p:sp>
+        <p:nvSpPr>
+          <p:cNvPr id="18" name="Rectángulo 17">
+            <a:extLst>
+              <a:ext uri="{FF2B5EF4-FFF2-40B4-BE49-F238E27FC236}">
+                <a16:creationId xmlns:a16="http://schemas.microsoft.com/office/drawing/2014/main" id="{78F0013B-D933-44DB-B456-09109A02EF33}"/>
+              </a:ext>
+            </a:extLst>
+          </p:cNvPr>
+          <p:cNvSpPr>
+            <a:spLocks noGrp="1"/>
+          </p:cNvSpPr>
+          <p:nvPr/>
+        </p:nvSpPr>
+        <p:spPr>
+          <a:xfrm>
+            <a:off x="800100" y="3543300"/>
+            <a:ext cx="666750" cy="333375"/>
+          </a:xfrm>
+          <a:prstGeom prst="rect">
+            <a:avLst/>
+          </a:prstGeom>
+          <a:noFill/>
+          <a:ln w="0">
+            <a:noFill/>
+            <a:prstDash val="solid"/>
+          </a:ln>
+        </p:spPr>
+        <p:txBody>
+          <a:bodyPr wrap="square" lIns="0" tIns="0" rIns="0" bIns="0" anchor="t">
+            <a:normAutofit/>
+          </a:bodyPr>
+          <a:lstStyle>
+            <a:defPPr algn="l">
+              <a:defRPr sz="1650" b="1">
+                <a:solidFill>
+                  <a:srgbClr val="C85E3A"/>
+                </a:solidFill>
+                <a:latin typeface="Arial"/>
+                <a:ea typeface="Arial"/>
+                <a:cs typeface="Arial"/>
+              </a:defRPr>
+            </a:defPPr>
+          </a:lstStyle>
+          <a:p>
+            <a:pPr algn="l">
+              <a:lnSpc>
+                <a:spcPct val="105000"/>
+              </a:lnSpc>
+              <a:buNone/>
+              <a:defRPr sz="1650" b="1">
+                <a:solidFill>
+                  <a:srgbClr val="C85E3A"/>
+                </a:solidFill>
+                <a:latin typeface="Arial"/>
+                <a:ea typeface="Arial"/>
+                <a:cs typeface="Arial"/>
+              </a:defRPr>
+            </a:pPr>
+            <a:r>
+              <a:rPr sz="1650" b="1">
+                <a:solidFill>
+                  <a:srgbClr val="C85E3A"/>
+                </a:solidFill>
+                <a:latin typeface="Arial"/>
+                <a:ea typeface="Arial"/>
+                <a:cs typeface="Arial"/>
+              </a:rPr>
+              <a:t>A3</a:t>
+            </a:r>
+          </a:p>
+        </p:txBody>
+      </p:sp>
+      <p:sp>
+        <p:nvSpPr>
+          <p:cNvPr id="19" name="Rectángulo 18">
+            <a:extLst>
+              <a:ext uri="{FF2B5EF4-FFF2-40B4-BE49-F238E27FC236}">
+                <a16:creationId xmlns:a16="http://schemas.microsoft.com/office/drawing/2014/main" id="{1F5BACE4-8F00-466D-91A6-AE60B6399FCB}"/>
+              </a:ext>
+            </a:extLst>
+          </p:cNvPr>
+          <p:cNvSpPr>
+            <a:spLocks noGrp="1"/>
+          </p:cNvSpPr>
+          <p:nvPr/>
+        </p:nvSpPr>
+        <p:spPr>
+          <a:xfrm>
+            <a:off x="1619250" y="3543300"/>
+            <a:ext cx="3714750" cy="342900"/>
+          </a:xfrm>
+          <a:prstGeom prst="rect">
+            <a:avLst/>
+          </a:prstGeom>
+          <a:noFill/>
+          <a:ln w="0">
+            <a:noFill/>
+            <a:prstDash val="solid"/>
+          </a:ln>
+        </p:spPr>
+        <p:txBody>
+          <a:bodyPr wrap="square" lIns="0" tIns="0" rIns="0" bIns="0" anchor="t">
+            <a:normAutofit/>
+          </a:bodyPr>
+          <a:lstStyle>
+            <a:defPPr algn="l">
+              <a:defRPr sz="1575" b="1">
+                <a:solidFill>
+                  <a:srgbClr val="C85E3A"/>
+                </a:solidFill>
+                <a:latin typeface="Arial"/>
+                <a:ea typeface="Arial"/>
+                <a:cs typeface="Arial"/>
+              </a:defRPr>
+            </a:defPPr>
+          </a:lstStyle>
+          <a:p>
+            <a:pPr algn="l">
+              <a:lnSpc>
+                <a:spcPct val="105000"/>
+              </a:lnSpc>
+              <a:buNone/>
+              <a:defRPr sz="1575" b="1">
+                <a:solidFill>
+                  <a:srgbClr val="C85E3A"/>
+                </a:solidFill>
+                <a:latin typeface="Arial"/>
+                <a:ea typeface="Arial"/>
+                <a:cs typeface="Arial"/>
+              </a:defRPr>
+            </a:pPr>
+            <a:r>
+              <a:rPr sz="1575" b="1">
+                <a:solidFill>
+                  <a:srgbClr val="C85E3A"/>
+                </a:solidFill>
+                <a:latin typeface="Arial"/>
+                <a:ea typeface="Arial"/>
+                <a:cs typeface="Arial"/>
+              </a:rPr>
+              <a:t>CNN + BatchNorm + Dropout</a:t>
+            </a:r>
+          </a:p>
+        </p:txBody>
+      </p:sp>
+      <p:sp>
+        <p:nvSpPr>
+          <p:cNvPr id="20" name="Rectángulo 19">
+            <a:extLst>
+              <a:ext uri="{FF2B5EF4-FFF2-40B4-BE49-F238E27FC236}">
+                <a16:creationId xmlns:a16="http://schemas.microsoft.com/office/drawing/2014/main" id="{E83A23E5-7B47-40F6-819E-72B07184CC3A}"/>
+              </a:ext>
+            </a:extLst>
+          </p:cNvPr>
+          <p:cNvSpPr>
+            <a:spLocks noGrp="1"/>
+          </p:cNvSpPr>
+          <p:nvPr/>
+        </p:nvSpPr>
+        <p:spPr>
+          <a:xfrm>
+            <a:off x="5524500" y="3543300"/>
+            <a:ext cx="1428750" cy="342900"/>
+          </a:xfrm>
+          <a:prstGeom prst="rect">
+            <a:avLst/>
+          </a:prstGeom>
+          <a:noFill/>
+          <a:ln w="0">
+            <a:noFill/>
+            <a:prstDash val="solid"/>
+          </a:ln>
+        </p:spPr>
+        <p:txBody>
+          <a:bodyPr wrap="square" lIns="0" tIns="0" rIns="0" bIns="0" anchor="t">
+            <a:normAutofit/>
+          </a:bodyPr>
+          <a:lstStyle>
+            <a:defPPr algn="r">
+              <a:defRPr sz="1650" b="1">
+                <a:solidFill>
+                  <a:srgbClr val="C85E3A"/>
+                </a:solidFill>
+                <a:latin typeface="Arial"/>
+                <a:ea typeface="Arial"/>
+                <a:cs typeface="Arial"/>
+              </a:defRPr>
+            </a:defPPr>
+          </a:lstStyle>
+          <a:p>
+            <a:pPr algn="r">
+              <a:lnSpc>
+                <a:spcPct val="105000"/>
+              </a:lnSpc>
+              <a:buNone/>
+              <a:defRPr sz="1650" b="1">
+                <a:solidFill>
+                  <a:srgbClr val="C85E3A"/>
+                </a:solidFill>
+                <a:latin typeface="Arial"/>
+                <a:ea typeface="Arial"/>
+                <a:cs typeface="Arial"/>
+              </a:defRPr>
+            </a:pPr>
+            <a:r>
+              <a:rPr sz="1650" b="1">
+                <a:solidFill>
+                  <a:srgbClr val="C85E3A"/>
+                </a:solidFill>
+                <a:latin typeface="Arial"/>
+                <a:ea typeface="Arial"/>
+                <a:cs typeface="Arial"/>
+              </a:rPr>
+              <a:t>94.82%</a:t>
+            </a:r>
+          </a:p>
+        </p:txBody>
+      </p:sp>
+      <p:sp>
+        <p:nvSpPr>
+          <p:cNvPr id="21" name="Rectángulo 20">
+            <a:extLst>
+              <a:ext uri="{FF2B5EF4-FFF2-40B4-BE49-F238E27FC236}">
+                <a16:creationId xmlns:a16="http://schemas.microsoft.com/office/drawing/2014/main" id="{239F7285-E5CB-4D21-9CA6-2DCB4A2F906A}"/>
+              </a:ext>
+            </a:extLst>
+          </p:cNvPr>
+          <p:cNvSpPr>
+            <a:spLocks noGrp="1"/>
+          </p:cNvSpPr>
+          <p:nvPr/>
+        </p:nvSpPr>
+        <p:spPr>
+          <a:xfrm>
+            <a:off x="742950" y="3981450"/>
+            <a:ext cx="6381750" cy="9525"/>
+          </a:xfrm>
+          <a:prstGeom prst="rect">
+            <a:avLst/>
+          </a:prstGeom>
+          <a:solidFill>
+            <a:srgbClr val="C8D7D5"/>
+          </a:solidFill>
+          <a:ln w="0">
+            <a:noFill/>
+            <a:prstDash val="solid"/>
+          </a:ln>
+        </p:spPr>
+      </p:sp>
+      <p:sp>
+        <p:nvSpPr>
+          <p:cNvPr id="22" name="Rectángulo 21">
+            <a:extLst>
+              <a:ext uri="{FF2B5EF4-FFF2-40B4-BE49-F238E27FC236}">
+                <a16:creationId xmlns:a16="http://schemas.microsoft.com/office/drawing/2014/main" id="{0F186571-471D-4AB4-85B5-FF8F7AF14E5D}"/>
+              </a:ext>
+            </a:extLst>
+          </p:cNvPr>
+          <p:cNvSpPr>
+            <a:spLocks noGrp="1"/>
+          </p:cNvSpPr>
+          <p:nvPr/>
+        </p:nvSpPr>
+        <p:spPr>
+          <a:xfrm>
+            <a:off x="800100" y="4171950"/>
+            <a:ext cx="666750" cy="333375"/>
+          </a:xfrm>
+          <a:prstGeom prst="rect">
+            <a:avLst/>
+          </a:prstGeom>
+          <a:noFill/>
+          <a:ln w="0">
+            <a:noFill/>
+            <a:prstDash val="solid"/>
+          </a:ln>
+        </p:spPr>
+        <p:txBody>
+          <a:bodyPr wrap="square" lIns="0" tIns="0" rIns="0" bIns="0" anchor="t">
+            <a:normAutofit/>
+          </a:bodyPr>
+          <a:lstStyle>
+            <a:defPPr algn="l">
+              <a:defRPr sz="1650" b="1">
+                <a:solidFill>
+                  <a:srgbClr val="178C87"/>
+                </a:solidFill>
+                <a:latin typeface="Arial"/>
+                <a:ea typeface="Arial"/>
+                <a:cs typeface="Arial"/>
+              </a:defRPr>
+            </a:defPPr>
+          </a:lstStyle>
+          <a:p>
+            <a:pPr algn="l">
+              <a:lnSpc>
+                <a:spcPct val="105000"/>
+              </a:lnSpc>
+              <a:buNone/>
+              <a:defRPr sz="1650" b="1">
+                <a:solidFill>
+                  <a:srgbClr val="178C87"/>
+                </a:solidFill>
+                <a:latin typeface="Arial"/>
+                <a:ea typeface="Arial"/>
+                <a:cs typeface="Arial"/>
+              </a:defRPr>
+            </a:pPr>
+            <a:r>
+              <a:rPr sz="1650" b="1">
+                <a:solidFill>
+                  <a:srgbClr val="178C87"/>
+                </a:solidFill>
+                <a:latin typeface="Arial"/>
+                <a:ea typeface="Arial"/>
+                <a:cs typeface="Arial"/>
+              </a:rPr>
+              <a:t>D1</a:t>
+            </a:r>
+          </a:p>
+        </p:txBody>
+      </p:sp>
+      <p:sp>
+        <p:nvSpPr>
+          <p:cNvPr id="23" name="Rectángulo 22">
+            <a:extLst>
+              <a:ext uri="{FF2B5EF4-FFF2-40B4-BE49-F238E27FC236}">
+                <a16:creationId xmlns:a16="http://schemas.microsoft.com/office/drawing/2014/main" id="{09B19737-2B6D-400D-B8ED-C0B4C4D85D45}"/>
+              </a:ext>
+            </a:extLst>
+          </p:cNvPr>
+          <p:cNvSpPr>
+            <a:spLocks noGrp="1"/>
+          </p:cNvSpPr>
+          <p:nvPr/>
+        </p:nvSpPr>
+        <p:spPr>
+          <a:xfrm>
+            <a:off x="1619250" y="4171950"/>
+            <a:ext cx="3714750" cy="342900"/>
+          </a:xfrm>
+          <a:prstGeom prst="rect">
+            <a:avLst/>
+          </a:prstGeom>
+          <a:noFill/>
+          <a:ln w="0">
+            <a:noFill/>
+            <a:prstDash val="solid"/>
+          </a:ln>
+        </p:spPr>
+        <p:txBody>
+          <a:bodyPr wrap="square" lIns="0" tIns="0" rIns="0" bIns="0" anchor="t">
+            <a:normAutofit/>
+          </a:bodyPr>
+          <a:lstStyle>
+            <a:defPPr algn="l">
+              <a:defRPr sz="1575" b="0">
+                <a:solidFill>
+                  <a:srgbClr val="18323B"/>
+                </a:solidFill>
+                <a:latin typeface="Arial"/>
+                <a:ea typeface="Arial"/>
+                <a:cs typeface="Arial"/>
+              </a:defRPr>
+            </a:defPPr>
+          </a:lstStyle>
+          <a:p>
+            <a:pPr algn="l">
+              <a:lnSpc>
+                <a:spcPct val="105000"/>
+              </a:lnSpc>
+              <a:buNone/>
+              <a:defRPr sz="1575" b="0">
+                <a:solidFill>
+                  <a:srgbClr val="18323B"/>
+                </a:solidFill>
+                <a:latin typeface="Arial"/>
+                <a:ea typeface="Arial"/>
+                <a:cs typeface="Arial"/>
+              </a:defRPr>
+            </a:pPr>
+            <a:r>
+              <a:rPr sz="1575" b="0">
+                <a:solidFill>
+                  <a:srgbClr val="18323B"/>
+                </a:solidFill>
+                <a:latin typeface="Arial"/>
+                <a:ea typeface="Arial"/>
+                <a:cs typeface="Arial"/>
+              </a:rPr>
+              <a:t>CNN + Dropout</a:t>
+            </a:r>
+          </a:p>
+        </p:txBody>
+      </p:sp>
+      <p:sp>
+        <p:nvSpPr>
+          <p:cNvPr id="24" name="Rectángulo 23">
+            <a:extLst>
+              <a:ext uri="{FF2B5EF4-FFF2-40B4-BE49-F238E27FC236}">
+                <a16:creationId xmlns:a16="http://schemas.microsoft.com/office/drawing/2014/main" id="{B78B350C-51D1-474C-BA4E-2E92B1ACBEC9}"/>
+              </a:ext>
+            </a:extLst>
+          </p:cNvPr>
+          <p:cNvSpPr>
+            <a:spLocks noGrp="1"/>
+          </p:cNvSpPr>
+          <p:nvPr/>
+        </p:nvSpPr>
+        <p:spPr>
+          <a:xfrm>
+            <a:off x="5524500" y="4171950"/>
+            <a:ext cx="1428750" cy="342900"/>
+          </a:xfrm>
+          <a:prstGeom prst="rect">
+            <a:avLst/>
+          </a:prstGeom>
+          <a:noFill/>
+          <a:ln w="0">
+            <a:noFill/>
+            <a:prstDash val="solid"/>
+          </a:ln>
+        </p:spPr>
+        <p:txBody>
+          <a:bodyPr wrap="square" lIns="0" tIns="0" rIns="0" bIns="0" anchor="t">
+            <a:normAutofit/>
+          </a:bodyPr>
+          <a:lstStyle>
+            <a:defPPr algn="r">
+              <a:defRPr sz="1650" b="1">
+                <a:solidFill>
+                  <a:srgbClr val="18323B"/>
+                </a:solidFill>
+                <a:latin typeface="Arial"/>
+                <a:ea typeface="Arial"/>
+                <a:cs typeface="Arial"/>
+              </a:defRPr>
+            </a:defPPr>
+          </a:lstStyle>
+          <a:p>
+            <a:pPr algn="r">
+              <a:lnSpc>
+                <a:spcPct val="105000"/>
+              </a:lnSpc>
+              <a:buNone/>
+              <a:defRPr sz="1650" b="1">
+                <a:solidFill>
+                  <a:srgbClr val="18323B"/>
+                </a:solidFill>
+                <a:latin typeface="Arial"/>
+                <a:ea typeface="Arial"/>
+                <a:cs typeface="Arial"/>
+              </a:defRPr>
+            </a:pPr>
+            <a:r>
+              <a:rPr sz="1650" b="1">
+                <a:solidFill>
+                  <a:srgbClr val="18323B"/>
+                </a:solidFill>
+                <a:latin typeface="Arial"/>
+                <a:ea typeface="Arial"/>
+                <a:cs typeface="Arial"/>
+              </a:rPr>
+              <a:t>88.83%</a:t>
+            </a:r>
+          </a:p>
+        </p:txBody>
+      </p:sp>
+      <p:sp>
+        <p:nvSpPr>
+          <p:cNvPr id="25" name="Rectángulo 24">
+            <a:extLst>
+              <a:ext uri="{FF2B5EF4-FFF2-40B4-BE49-F238E27FC236}">
+                <a16:creationId xmlns:a16="http://schemas.microsoft.com/office/drawing/2014/main" id="{51D09DF6-47E0-42FD-9FAC-059C12FB758C}"/>
+              </a:ext>
+            </a:extLst>
+          </p:cNvPr>
+          <p:cNvSpPr>
+            <a:spLocks noGrp="1"/>
+          </p:cNvSpPr>
+          <p:nvPr/>
+        </p:nvSpPr>
+        <p:spPr>
+          <a:xfrm>
+            <a:off x="742950" y="4610100"/>
+            <a:ext cx="6381750" cy="9525"/>
+          </a:xfrm>
+          <a:prstGeom prst="rect">
+            <a:avLst/>
+          </a:prstGeom>
+          <a:solidFill>
+            <a:srgbClr val="C8D7D5"/>
+          </a:solidFill>
+          <a:ln w="0">
+            <a:noFill/>
+            <a:prstDash val="solid"/>
+          </a:ln>
+        </p:spPr>
+      </p:sp>
+      <p:sp>
+        <p:nvSpPr>
+          <p:cNvPr id="26" name="Rectángulo 25">
+            <a:extLst>
+              <a:ext uri="{FF2B5EF4-FFF2-40B4-BE49-F238E27FC236}">
+                <a16:creationId xmlns:a16="http://schemas.microsoft.com/office/drawing/2014/main" id="{CF28B05A-28A5-4382-B796-9F0C77003AF3}"/>
+              </a:ext>
+            </a:extLst>
+          </p:cNvPr>
+          <p:cNvSpPr>
+            <a:spLocks noGrp="1"/>
+          </p:cNvSpPr>
+          <p:nvPr/>
+        </p:nvSpPr>
+        <p:spPr>
+          <a:xfrm>
+            <a:off x="800100" y="4800600"/>
+            <a:ext cx="666750" cy="333375"/>
+          </a:xfrm>
+          <a:prstGeom prst="rect">
+            <a:avLst/>
+          </a:prstGeom>
+          <a:noFill/>
+          <a:ln w="0">
+            <a:noFill/>
+            <a:prstDash val="solid"/>
+          </a:ln>
+        </p:spPr>
+        <p:txBody>
+          <a:bodyPr wrap="square" lIns="0" tIns="0" rIns="0" bIns="0" anchor="t">
+            <a:normAutofit/>
+          </a:bodyPr>
+          <a:lstStyle>
+            <a:defPPr algn="l">
+              <a:defRPr sz="1650" b="1">
+                <a:solidFill>
+                  <a:srgbClr val="178C87"/>
+                </a:solidFill>
+                <a:latin typeface="Arial"/>
+                <a:ea typeface="Arial"/>
+                <a:cs typeface="Arial"/>
+              </a:defRPr>
+            </a:defPPr>
+          </a:lstStyle>
+          <a:p>
+            <a:pPr algn="l">
+              <a:lnSpc>
+                <a:spcPct val="105000"/>
+              </a:lnSpc>
+              <a:buNone/>
+              <a:defRPr sz="1650" b="1">
+                <a:solidFill>
+                  <a:srgbClr val="178C87"/>
+                </a:solidFill>
+                <a:latin typeface="Arial"/>
+                <a:ea typeface="Arial"/>
+                <a:cs typeface="Arial"/>
+              </a:defRPr>
+            </a:pPr>
+            <a:r>
+              <a:rPr sz="1650" b="1">
+                <a:solidFill>
+                  <a:srgbClr val="178C87"/>
+                </a:solidFill>
+                <a:latin typeface="Arial"/>
+                <a:ea typeface="Arial"/>
+                <a:cs typeface="Arial"/>
+              </a:rPr>
+              <a:t>C1</a:t>
+            </a:r>
+          </a:p>
+        </p:txBody>
+      </p:sp>
+      <p:sp>
+        <p:nvSpPr>
+          <p:cNvPr id="27" name="Rectángulo 26">
+            <a:extLst>
+              <a:ext uri="{FF2B5EF4-FFF2-40B4-BE49-F238E27FC236}">
+                <a16:creationId xmlns:a16="http://schemas.microsoft.com/office/drawing/2014/main" id="{DAAFC40A-CF39-4955-B594-F4D16AC8D50E}"/>
+              </a:ext>
+            </a:extLst>
+          </p:cNvPr>
+          <p:cNvSpPr>
+            <a:spLocks noGrp="1"/>
+          </p:cNvSpPr>
+          <p:nvPr/>
+        </p:nvSpPr>
+        <p:spPr>
+          <a:xfrm>
+            <a:off x="1619250" y="4800600"/>
+            <a:ext cx="3714750" cy="342900"/>
+          </a:xfrm>
+          <a:prstGeom prst="rect">
+            <a:avLst/>
+          </a:prstGeom>
+          <a:noFill/>
+          <a:ln w="0">
+            <a:noFill/>
+            <a:prstDash val="solid"/>
+          </a:ln>
+        </p:spPr>
+        <p:txBody>
+          <a:bodyPr wrap="square" lIns="0" tIns="0" rIns="0" bIns="0" anchor="t">
+            <a:normAutofit/>
+          </a:bodyPr>
+          <a:lstStyle>
+            <a:defPPr algn="l">
+              <a:defRPr sz="1575" b="0">
+                <a:solidFill>
+                  <a:srgbClr val="18323B"/>
+                </a:solidFill>
+                <a:latin typeface="Arial"/>
+                <a:ea typeface="Arial"/>
+                <a:cs typeface="Arial"/>
+              </a:defRPr>
+            </a:defPPr>
+          </a:lstStyle>
+          <a:p>
+            <a:pPr algn="l">
+              <a:lnSpc>
+                <a:spcPct val="105000"/>
+              </a:lnSpc>
+              <a:buNone/>
+              <a:defRPr sz="1575" b="0">
+                <a:solidFill>
+                  <a:srgbClr val="18323B"/>
+                </a:solidFill>
+                <a:latin typeface="Arial"/>
+                <a:ea typeface="Arial"/>
+                <a:cs typeface="Arial"/>
+              </a:defRPr>
+            </a:pPr>
+            <a:r>
+              <a:rPr sz="1575" b="0">
+                <a:solidFill>
+                  <a:srgbClr val="18323B"/>
+                </a:solidFill>
+                <a:latin typeface="Arial"/>
+                <a:ea typeface="Arial"/>
+                <a:cs typeface="Arial"/>
+              </a:rPr>
+              <a:t>CNN base, LR 0.0003</a:t>
+            </a:r>
+          </a:p>
+        </p:txBody>
+      </p:sp>
+      <p:sp>
+        <p:nvSpPr>
+          <p:cNvPr id="28" name="Rectángulo 27">
+            <a:extLst>
+              <a:ext uri="{FF2B5EF4-FFF2-40B4-BE49-F238E27FC236}">
+                <a16:creationId xmlns:a16="http://schemas.microsoft.com/office/drawing/2014/main" id="{41C7F9E8-E837-40E6-913A-635331FE347E}"/>
+              </a:ext>
+            </a:extLst>
+          </p:cNvPr>
+          <p:cNvSpPr>
+            <a:spLocks noGrp="1"/>
+          </p:cNvSpPr>
+          <p:nvPr/>
+        </p:nvSpPr>
+        <p:spPr>
+          <a:xfrm>
+            <a:off x="5524500" y="4800600"/>
+            <a:ext cx="1428750" cy="342900"/>
+          </a:xfrm>
+          <a:prstGeom prst="rect">
+            <a:avLst/>
+          </a:prstGeom>
+          <a:noFill/>
+          <a:ln w="0">
+            <a:noFill/>
+            <a:prstDash val="solid"/>
+          </a:ln>
+        </p:spPr>
+        <p:txBody>
+          <a:bodyPr wrap="square" lIns="0" tIns="0" rIns="0" bIns="0" anchor="t">
+            <a:normAutofit/>
+          </a:bodyPr>
+          <a:lstStyle>
+            <a:defPPr algn="r">
+              <a:defRPr sz="1650" b="1">
+                <a:solidFill>
+                  <a:srgbClr val="18323B"/>
+                </a:solidFill>
+                <a:latin typeface="Arial"/>
+                <a:ea typeface="Arial"/>
+                <a:cs typeface="Arial"/>
+              </a:defRPr>
+            </a:defPPr>
+          </a:lstStyle>
+          <a:p>
+            <a:pPr algn="r">
+              <a:lnSpc>
+                <a:spcPct val="105000"/>
+              </a:lnSpc>
+              <a:buNone/>
+              <a:defRPr sz="1650" b="1">
+                <a:solidFill>
+                  <a:srgbClr val="18323B"/>
+                </a:solidFill>
+                <a:latin typeface="Arial"/>
+                <a:ea typeface="Arial"/>
+                <a:cs typeface="Arial"/>
+              </a:defRPr>
+            </a:pPr>
+            <a:r>
+              <a:rPr sz="1650" b="1">
+                <a:solidFill>
+                  <a:srgbClr val="18323B"/>
+                </a:solidFill>
+                <a:latin typeface="Arial"/>
+                <a:ea typeface="Arial"/>
+                <a:cs typeface="Arial"/>
+              </a:rPr>
+              <a:t>81.93%</a:t>
+            </a:r>
+          </a:p>
+        </p:txBody>
+      </p:sp>
+      <p:sp>
+        <p:nvSpPr>
+          <p:cNvPr id="29" name="Rectángulo 28">
+            <a:extLst>
+              <a:ext uri="{FF2B5EF4-FFF2-40B4-BE49-F238E27FC236}">
+                <a16:creationId xmlns:a16="http://schemas.microsoft.com/office/drawing/2014/main" id="{4B126592-C54D-4B71-A76E-0B7D0DB6BC85}"/>
+              </a:ext>
+            </a:extLst>
+          </p:cNvPr>
+          <p:cNvSpPr>
+            <a:spLocks noGrp="1"/>
+          </p:cNvSpPr>
+          <p:nvPr/>
+        </p:nvSpPr>
+        <p:spPr>
+          <a:xfrm>
+            <a:off x="742950" y="5238750"/>
+            <a:ext cx="6381750" cy="9525"/>
+          </a:xfrm>
+          <a:prstGeom prst="rect">
+            <a:avLst/>
+          </a:prstGeom>
+          <a:solidFill>
+            <a:srgbClr val="C8D7D5"/>
+          </a:solidFill>
+          <a:ln w="0">
+            <a:noFill/>
+            <a:prstDash val="solid"/>
+          </a:ln>
+        </p:spPr>
+      </p:sp>
+      <p:sp>
+        <p:nvSpPr>
+          <p:cNvPr id="30" name="Rectángulo 29">
+            <a:extLst>
+              <a:ext uri="{FF2B5EF4-FFF2-40B4-BE49-F238E27FC236}">
+                <a16:creationId xmlns:a16="http://schemas.microsoft.com/office/drawing/2014/main" id="{BB2832B5-5F65-48F0-8B66-5DB01BBC691B}"/>
+              </a:ext>
+            </a:extLst>
+          </p:cNvPr>
+          <p:cNvSpPr>
+            <a:spLocks noGrp="1"/>
+          </p:cNvSpPr>
+          <p:nvPr/>
+        </p:nvSpPr>
+        <p:spPr>
+          <a:xfrm>
+            <a:off x="7724775" y="1790700"/>
+            <a:ext cx="19050" cy="3562350"/>
+          </a:xfrm>
+          <a:prstGeom prst="rect">
+            <a:avLst/>
+          </a:prstGeom>
+          <a:solidFill>
+            <a:srgbClr val="C8D7D5"/>
+          </a:solidFill>
+          <a:ln w="0">
+            <a:noFill/>
+            <a:prstDash val="solid"/>
+          </a:ln>
+        </p:spPr>
+      </p:sp>
+      <p:sp>
+        <p:nvSpPr>
+          <p:cNvPr id="31" name="Rectángulo 30">
+            <a:extLst>
+              <a:ext uri="{FF2B5EF4-FFF2-40B4-BE49-F238E27FC236}">
+                <a16:creationId xmlns:a16="http://schemas.microsoft.com/office/drawing/2014/main" id="{247C4442-2B4F-438D-B499-D0A92B8DA58B}"/>
+              </a:ext>
+            </a:extLst>
+          </p:cNvPr>
+          <p:cNvSpPr>
+            <a:spLocks noGrp="1"/>
+          </p:cNvSpPr>
+          <p:nvPr/>
+        </p:nvSpPr>
+        <p:spPr>
+          <a:xfrm>
+            <a:off x="8058150" y="1895475"/>
+            <a:ext cx="2952750" cy="647700"/>
+          </a:xfrm>
+          <a:prstGeom prst="rect">
+            <a:avLst/>
+          </a:prstGeom>
+          <a:noFill/>
+          <a:ln w="0">
+            <a:noFill/>
+            <a:prstDash val="solid"/>
+          </a:ln>
+        </p:spPr>
+        <p:txBody>
+          <a:bodyPr wrap="square" lIns="0" tIns="0" rIns="0" bIns="0" anchor="t">
+            <a:normAutofit/>
+          </a:bodyPr>
+          <a:lstStyle>
+            <a:defPPr algn="l">
+              <a:defRPr sz="3600" b="1">
+                <a:solidFill>
+                  <a:srgbClr val="C85E3A"/>
+                </a:solidFill>
+                <a:latin typeface="Arial"/>
+                <a:ea typeface="Arial"/>
+                <a:cs typeface="Arial"/>
+              </a:defRPr>
+            </a:defPPr>
+          </a:lstStyle>
+          <a:p>
+            <a:pPr algn="l">
+              <a:lnSpc>
+                <a:spcPct val="105000"/>
+              </a:lnSpc>
+              <a:buNone/>
+              <a:defRPr sz="3600" b="1">
+                <a:solidFill>
+                  <a:srgbClr val="C85E3A"/>
+                </a:solidFill>
+                <a:latin typeface="Arial"/>
+                <a:ea typeface="Arial"/>
+                <a:cs typeface="Arial"/>
+              </a:defRPr>
+            </a:pPr>
+            <a:r>
+              <a:rPr sz="3600" b="1">
+                <a:solidFill>
+                  <a:srgbClr val="C85E3A"/>
+                </a:solidFill>
+                <a:latin typeface="Arial"/>
+                <a:ea typeface="Arial"/>
+                <a:cs typeface="Arial"/>
+              </a:rPr>
+              <a:t>94.82%</a:t>
+            </a:r>
+          </a:p>
+        </p:txBody>
+      </p:sp>
+      <p:sp>
+        <p:nvSpPr>
+          <p:cNvPr id="32" name="Rectángulo 31">
+            <a:extLst>
+              <a:ext uri="{FF2B5EF4-FFF2-40B4-BE49-F238E27FC236}">
+                <a16:creationId xmlns:a16="http://schemas.microsoft.com/office/drawing/2014/main" id="{E138D840-A461-4444-9D81-3D57EEC74EFB}"/>
+              </a:ext>
+            </a:extLst>
+          </p:cNvPr>
+          <p:cNvSpPr>
+            <a:spLocks noGrp="1"/>
+          </p:cNvSpPr>
+          <p:nvPr/>
+        </p:nvSpPr>
+        <p:spPr>
+          <a:xfrm>
+            <a:off x="8086725" y="2571750"/>
+            <a:ext cx="3143250" cy="523875"/>
+          </a:xfrm>
+          <a:prstGeom prst="rect">
+            <a:avLst/>
+          </a:prstGeom>
+          <a:noFill/>
+          <a:ln w="0">
+            <a:noFill/>
+            <a:prstDash val="solid"/>
+          </a:ln>
+        </p:spPr>
+        <p:txBody>
+          <a:bodyPr wrap="square" lIns="0" tIns="0" rIns="0" bIns="0" anchor="t">
+            <a:normAutofit fontScale="94893"/>
+          </a:bodyPr>
+          <a:lstStyle>
+            <a:defPPr algn="l">
+              <a:defRPr sz="1725" b="1">
+                <a:solidFill>
+                  <a:srgbClr val="102A36"/>
+                </a:solidFill>
+                <a:latin typeface="Arial"/>
+                <a:ea typeface="Arial"/>
+                <a:cs typeface="Arial"/>
+              </a:defRPr>
+            </a:defPPr>
+          </a:lstStyle>
+          <a:p>
+            <a:pPr algn="l">
+              <a:lnSpc>
+                <a:spcPct val="105000"/>
+              </a:lnSpc>
+              <a:buNone/>
+              <a:defRPr sz="1725" b="1">
+                <a:solidFill>
+                  <a:srgbClr val="102A36"/>
+                </a:solidFill>
+                <a:latin typeface="Arial"/>
+                <a:ea typeface="Arial"/>
+                <a:cs typeface="Arial"/>
+              </a:defRPr>
+            </a:pPr>
+            <a:r>
+              <a:rPr sz="1725" b="1">
+                <a:solidFill>
+                  <a:srgbClr val="102A36"/>
+                </a:solidFill>
+                <a:latin typeface="Arial"/>
+                <a:ea typeface="Arial"/>
+                <a:cs typeface="Arial"/>
+              </a:rPr>
+              <a:t>A3 · mejor macro-F1 de validación</a:t>
+            </a:r>
+          </a:p>
+        </p:txBody>
+      </p:sp>
+      <p:sp>
+        <p:nvSpPr>
+          <p:cNvPr id="33" name="Rectángulo 32">
+            <a:extLst>
+              <a:ext uri="{FF2B5EF4-FFF2-40B4-BE49-F238E27FC236}">
+                <a16:creationId xmlns:a16="http://schemas.microsoft.com/office/drawing/2014/main" id="{145C9109-8832-449A-84E4-D57C7991E869}"/>
+              </a:ext>
+            </a:extLst>
+          </p:cNvPr>
+          <p:cNvSpPr>
+            <a:spLocks noGrp="1"/>
+          </p:cNvSpPr>
+          <p:nvPr/>
+        </p:nvSpPr>
+        <p:spPr>
+          <a:xfrm>
+            <a:off x="8086725" y="3314700"/>
+            <a:ext cx="3143250" cy="933450"/>
+          </a:xfrm>
+          <a:prstGeom prst="rect">
+            <a:avLst/>
+          </a:prstGeom>
+          <a:noFill/>
+          <a:ln w="0">
+            <a:noFill/>
+            <a:prstDash val="solid"/>
+          </a:ln>
+        </p:spPr>
+        <p:txBody>
+          <a:bodyPr wrap="square" lIns="0" tIns="0" rIns="0" bIns="0" anchor="t">
+            <a:normAutofit/>
+          </a:bodyPr>
+          <a:lstStyle>
+            <a:defPPr algn="l">
+              <a:defRPr sz="1575" b="0">
+                <a:solidFill>
+                  <a:srgbClr val="18323B"/>
+                </a:solidFill>
+                <a:latin typeface="Arial"/>
+                <a:ea typeface="Arial"/>
+                <a:cs typeface="Arial"/>
+              </a:defRPr>
+            </a:defPPr>
+          </a:lstStyle>
+          <a:p>
+            <a:pPr algn="l">
+              <a:lnSpc>
+                <a:spcPct val="114000"/>
+              </a:lnSpc>
+              <a:buNone/>
+              <a:defRPr sz="1575" b="0">
+                <a:solidFill>
+                  <a:srgbClr val="18323B"/>
+                </a:solidFill>
+                <a:latin typeface="Arial"/>
+                <a:ea typeface="Arial"/>
+                <a:cs typeface="Arial"/>
+              </a:defRPr>
+            </a:pPr>
+            <a:r>
+              <a:rPr sz="1575" b="0">
+                <a:solidFill>
+                  <a:srgbClr val="18323B"/>
+                </a:solidFill>
+                <a:latin typeface="Arial"/>
+                <a:ea typeface="Arial"/>
+                <a:cs typeface="Arial"/>
+              </a:rPr>
+              <a:t>A2 quedó muy cerca: 94.66%. La diferencia entre ambos fue de 0.17 puntos porcentuales.</a:t>
+            </a:r>
+          </a:p>
+        </p:txBody>
+      </p:sp>
+      <p:sp>
+        <p:nvSpPr>
+          <p:cNvPr id="34" name="Rectángulo 33">
+            <a:extLst>
+              <a:ext uri="{FF2B5EF4-FFF2-40B4-BE49-F238E27FC236}">
+                <a16:creationId xmlns:a16="http://schemas.microsoft.com/office/drawing/2014/main" id="{0C153626-37E5-4AE3-BB7F-248A945CDA6E}"/>
+              </a:ext>
+            </a:extLst>
+          </p:cNvPr>
+          <p:cNvSpPr>
+            <a:spLocks noGrp="1"/>
+          </p:cNvSpPr>
+          <p:nvPr/>
+        </p:nvSpPr>
+        <p:spPr>
+          <a:xfrm>
+            <a:off x="8086725" y="4514850"/>
+            <a:ext cx="3143250" cy="1047750"/>
+          </a:xfrm>
+          <a:prstGeom prst="rect">
+            <a:avLst/>
+          </a:prstGeom>
+          <a:noFill/>
+          <a:ln w="0">
+            <a:noFill/>
+            <a:prstDash val="solid"/>
+          </a:ln>
+        </p:spPr>
+        <p:txBody>
+          <a:bodyPr wrap="square" lIns="0" tIns="0" rIns="0" bIns="0" anchor="t">
+            <a:normAutofit fontScale="95725"/>
+          </a:bodyPr>
+          <a:lstStyle>
+            <a:defPPr algn="l">
+              <a:defRPr sz="1575" b="0">
+                <a:solidFill>
+                  <a:srgbClr val="536C73"/>
+                </a:solidFill>
+                <a:latin typeface="Arial"/>
+                <a:ea typeface="Arial"/>
+                <a:cs typeface="Arial"/>
+              </a:defRPr>
+            </a:defPPr>
+          </a:lstStyle>
+          <a:p>
+            <a:pPr algn="l">
+              <a:lnSpc>
+                <a:spcPct val="114000"/>
+              </a:lnSpc>
+              <a:buNone/>
+              <a:defRPr sz="1575" b="0">
+                <a:solidFill>
+                  <a:srgbClr val="536C73"/>
+                </a:solidFill>
+                <a:latin typeface="Arial"/>
+                <a:ea typeface="Arial"/>
+                <a:cs typeface="Arial"/>
+              </a:defRPr>
+            </a:pPr>
+            <a:r>
+              <a:rPr sz="1575" b="0">
+                <a:solidFill>
+                  <a:srgbClr val="536C73"/>
+                </a:solidFill>
+                <a:latin typeface="Arial"/>
+                <a:ea typeface="Arial"/>
+                <a:cs typeface="Arial"/>
+              </a:rPr>
+              <a:t>A2 y A3 superaron a la CNN base. D1 quedó casi al nivel de A1. C1 no alcanzó ese desempeño en 40 épocas.</a:t>
+            </a:r>
+          </a:p>
+        </p:txBody>
+      </p:sp>
     </p:spTree>
     <p:extLst>
       <p:ext uri="{BB962C8B-B14F-4D97-AF65-F5344CB8AC3E}">
-        <p14:creationId xmlns:p14="http://schemas.microsoft.com/office/powerpoint/2010/main" val="470703015"/>
+        <p14:creationId xmlns:p14="http://schemas.microsoft.com/office/powerpoint/2010/main" val="118541337"/>
       </p:ext>
     </p:extLst>
   </p:cSld>
